--- a/RA1 - Seguretat passiva/AA2 - Sistemes alimentacio ininterrompuda/RA1_AA2_Sistemes_Alimentacio_Ininterrompuda.pptx
+++ b/RA1 - Seguretat passiva/AA2 - Sistemes alimentacio ininterrompuda/RA1_AA2_Sistemes_Alimentacio_Ininterrompuda.pptx
@@ -14,13 +14,17 @@
     <p:sldId id="262" r:id="rId8"/>
     <p:sldId id="263" r:id="rId9"/>
     <p:sldId id="264" r:id="rId10"/>
+    <p:sldId id="276" r:id="rId27"/>
     <p:sldId id="265" r:id="rId11"/>
+    <p:sldId id="277" r:id="rId28"/>
     <p:sldId id="266" r:id="rId12"/>
     <p:sldId id="267" r:id="rId13"/>
     <p:sldId id="268" r:id="rId14"/>
     <p:sldId id="269" r:id="rId15"/>
+    <p:sldId id="278" r:id="rId29"/>
     <p:sldId id="270" r:id="rId16"/>
     <p:sldId id="271" r:id="rId17"/>
+    <p:sldId id="279" r:id="rId30"/>
     <p:sldId id="272" r:id="rId18"/>
     <p:sldId id="273" r:id="rId19"/>
     <p:sldId id="274" r:id="rId20"/>
@@ -2585,6 +2589,10 @@
           </a:solidFill>
           <a:ln/>
         </p:spPr>
+        <p:txBody>
+          <a:bodyPr/>
+          <a:p/>
+        </p:txBody>
       </p:sp>
       <p:sp>
         <p:nvSpPr>
@@ -2607,6 +2615,10 @@
           </a:solidFill>
           <a:ln/>
         </p:spPr>
+        <p:txBody>
+          <a:bodyPr/>
+          <a:p/>
+        </p:txBody>
       </p:sp>
       <p:sp>
         <p:nvSpPr>
@@ -2627,6 +2639,10 @@
           </a:solidFill>
           <a:ln/>
         </p:spPr>
+        <p:txBody>
+          <a:bodyPr/>
+          <a:p/>
+        </p:txBody>
       </p:sp>
       <p:pic>
         <p:nvPicPr>
@@ -2791,6 +2807,10 @@
             <a:prstDash val="solid"/>
           </a:ln>
         </p:spPr>
+        <p:txBody>
+          <a:bodyPr/>
+          <a:p/>
+        </p:txBody>
       </p:sp>
       <p:sp>
         <p:nvSpPr>
@@ -2918,6 +2938,230 @@
 </file>
 
 <file path=ppt/slides/slide10.xml><?xml version="1.0" encoding="utf-8"?>
+<p:sld xmlns:a="http://schemas.openxmlformats.org/drawingml/2006/main" xmlns:p="http://schemas.openxmlformats.org/presentationml/2006/main" xmlns:r="http://schemas.openxmlformats.org/officeDocument/2006/relationships">
+  <p:cSld>
+    <p:bg>
+      <p:bgPr>
+        <a:solidFill>
+          <a:srgbClr val="F4F7F9"/>
+        </a:solidFill>
+        <a:effectLst/>
+      </p:bgPr>
+    </p:bg>
+    <p:spTree>
+      <p:nvGrpSpPr>
+        <p:cNvPr id="1" name=""/>
+        <p:cNvGrpSpPr/>
+        <p:nvPr/>
+      </p:nvGrpSpPr>
+      <p:grpSpPr/>
+      <p:sp>
+        <p:nvSpPr>
+          <p:cNvPr id="2" name="TextBox 1"/>
+          <p:cNvSpPr txBox="1"/>
+          <p:nvPr/>
+        </p:nvSpPr>
+        <p:spPr>
+          <a:xfrm>
+            <a:off x="548640" y="411480"/>
+            <a:ext cx="10515600" cy="320040"/>
+          </a:xfrm>
+          <a:prstGeom prst="rect">
+            <a:avLst/>
+          </a:prstGeom>
+          <a:noFill/>
+        </p:spPr>
+        <p:txBody>
+          <a:bodyPr wrap="square">
+            <a:spAutoFit/>
+          </a:bodyPr>
+          <a:lstStyle/>
+          <a:p>
+            <a:pPr algn="l"/>
+            <a:r>
+              <a:rPr sz="1300" b="1" i="0">
+                <a:solidFill>
+                  <a:srgbClr val="F2A541"/>
+                </a:solidFill>
+                <a:latin typeface="Calibri"/>
+              </a:rPr>
+              <a:t>UN EXEMPLE REAL</a:t>
+            </a:r>
+          </a:p>
+        </p:txBody>
+      </p:sp>
+      <p:sp>
+        <p:nvSpPr>
+          <p:cNvPr id="3" name="TextBox 2"/>
+          <p:cNvSpPr txBox="1"/>
+          <p:nvPr/>
+        </p:nvSpPr>
+        <p:spPr>
+          <a:xfrm>
+            <a:off x="548640" y="685800"/>
+            <a:ext cx="10972800" cy="822960"/>
+          </a:xfrm>
+          <a:prstGeom prst="rect">
+            <a:avLst/>
+          </a:prstGeom>
+          <a:noFill/>
+        </p:spPr>
+        <p:txBody>
+          <a:bodyPr wrap="square">
+            <a:spAutoFit/>
+          </a:bodyPr>
+          <a:lstStyle/>
+          <a:p>
+            <a:pPr algn="l"/>
+            <a:r>
+              <a:rPr sz="2800" b="1" i="0">
+                <a:solidFill>
+                  <a:srgbClr val="16242E"/>
+                </a:solidFill>
+                <a:latin typeface="Cambria"/>
+              </a:rPr>
+              <a:t>SAI de la companyia APC</a:t>
+            </a:r>
+          </a:p>
+        </p:txBody>
+      </p:sp>
+      <p:sp>
+        <p:nvSpPr>
+          <p:cNvPr id="4" name="TextBox 3"/>
+          <p:cNvSpPr txBox="1"/>
+          <p:nvPr/>
+        </p:nvSpPr>
+        <p:spPr>
+          <a:xfrm>
+            <a:off x="548640" y="1417320"/>
+            <a:ext cx="10789920" cy="548640"/>
+          </a:xfrm>
+          <a:prstGeom prst="rect">
+            <a:avLst/>
+          </a:prstGeom>
+          <a:noFill/>
+        </p:spPr>
+        <p:txBody>
+          <a:bodyPr wrap="square">
+            <a:spAutoFit/>
+          </a:bodyPr>
+          <a:lstStyle/>
+          <a:p>
+            <a:pPr algn="l"/>
+            <a:r>
+              <a:rPr sz="1300" b="0" i="0">
+                <a:solidFill>
+                  <a:srgbClr val="5B6B77"/>
+                </a:solidFill>
+                <a:latin typeface="Calibri"/>
+              </a:rPr>
+              <a:t>Part davantera: el panell frontal mostra l'estat i els indicadors de línia/bateria.</a:t>
+            </a:r>
+          </a:p>
+        </p:txBody>
+      </p:sp>
+      <p:pic>
+        <p:nvPicPr>
+          <p:cNvPr id="5" name="Picture 4" descr="foto_sai_apc_davant.png"/>
+          <p:cNvPicPr>
+            <a:picLocks noChangeAspect="1"/>
+          </p:cNvPicPr>
+          <p:nvPr/>
+        </p:nvPicPr>
+        <p:blipFill>
+          <a:blip r:embed="rId2"/>
+          <a:stretch>
+            <a:fillRect/>
+          </a:stretch>
+        </p:blipFill>
+        <p:spPr>
+          <a:xfrm>
+            <a:off x="4449927" y="1920240"/>
+            <a:ext cx="3291840" cy="3588848"/>
+          </a:xfrm>
+          <a:prstGeom prst="rect">
+            <a:avLst/>
+          </a:prstGeom>
+        </p:spPr>
+      </p:pic>
+      <p:sp>
+        <p:nvSpPr>
+          <p:cNvPr id="6" name="TextBox 5"/>
+          <p:cNvSpPr txBox="1"/>
+          <p:nvPr/>
+        </p:nvSpPr>
+        <p:spPr>
+          <a:xfrm>
+            <a:off x="548640" y="5646248"/>
+            <a:ext cx="11064240" cy="457200"/>
+          </a:xfrm>
+          <a:prstGeom prst="rect">
+            <a:avLst/>
+          </a:prstGeom>
+          <a:noFill/>
+        </p:spPr>
+        <p:txBody>
+          <a:bodyPr wrap="square">
+            <a:spAutoFit/>
+          </a:bodyPr>
+          <a:lstStyle/>
+          <a:p>
+            <a:pPr algn="ctr"/>
+            <a:r>
+              <a:rPr sz="1200" b="0" i="1">
+                <a:solidFill>
+                  <a:srgbClr val="5B6B77"/>
+                </a:solidFill>
+                <a:latin typeface="Calibri"/>
+              </a:rPr>
+              <a:t>SAI de la companyia APC (part davantera).</a:t>
+            </a:r>
+          </a:p>
+        </p:txBody>
+      </p:sp>
+      <p:sp>
+        <p:nvSpPr>
+          <p:cNvPr id="7" name="TextBox 6"/>
+          <p:cNvSpPr txBox="1"/>
+          <p:nvPr/>
+        </p:nvSpPr>
+        <p:spPr>
+          <a:xfrm>
+            <a:off x="11548872" y="6446520"/>
+            <a:ext cx="365760" cy="274320"/>
+          </a:xfrm>
+          <a:prstGeom prst="rect">
+            <a:avLst/>
+          </a:prstGeom>
+          <a:noFill/>
+        </p:spPr>
+        <p:txBody>
+          <a:bodyPr wrap="none">
+            <a:spAutoFit/>
+          </a:bodyPr>
+          <a:lstStyle/>
+          <a:p>
+            <a:pPr algn="r"/>
+            <a:r>
+              <a:rPr sz="1000">
+                <a:solidFill>
+                  <a:srgbClr val="5B6B77"/>
+                </a:solidFill>
+              </a:rPr>
+              <a:t>10</a:t>
+            </a:r>
+          </a:p>
+        </p:txBody>
+      </p:sp>
+    </p:spTree>
+  </p:cSld>
+  <p:clrMapOvr>
+    <a:masterClrMapping/>
+  </p:clrMapOvr>
+</p:sld>
+</file>
+
+<file path=ppt/slides/slide11.xml><?xml version="1.0" encoding="utf-8"?>
 <p:sld xmlns:a="http://schemas.openxmlformats.org/drawingml/2006/main" xmlns:r="http://schemas.openxmlformats.org/officeDocument/2006/relationships" xmlns:p="http://schemas.openxmlformats.org/presentationml/2006/main">
   <p:cSld name="Slide 10">
     <p:bg>
@@ -3047,6 +3291,10 @@
             </a:outerShdw>
           </a:effectLst>
         </p:spPr>
+        <p:txBody>
+          <a:bodyPr/>
+          <a:p/>
+        </p:txBody>
       </p:sp>
       <p:sp>
         <p:nvSpPr>
@@ -3067,6 +3315,10 @@
           </a:solidFill>
           <a:ln/>
         </p:spPr>
+        <p:txBody>
+          <a:bodyPr/>
+          <a:p/>
+        </p:txBody>
       </p:sp>
       <p:pic>
         <p:nvPicPr>
@@ -3198,6 +3450,10 @@
             </a:outerShdw>
           </a:effectLst>
         </p:spPr>
+        <p:txBody>
+          <a:bodyPr/>
+          <a:p/>
+        </p:txBody>
       </p:sp>
       <p:sp>
         <p:nvSpPr>
@@ -3218,6 +3474,10 @@
           </a:solidFill>
           <a:ln/>
         </p:spPr>
+        <p:txBody>
+          <a:bodyPr/>
+          <a:p/>
+        </p:txBody>
       </p:sp>
       <p:pic>
         <p:nvPicPr>
@@ -3349,6 +3609,10 @@
             </a:outerShdw>
           </a:effectLst>
         </p:spPr>
+        <p:txBody>
+          <a:bodyPr/>
+          <a:p/>
+        </p:txBody>
       </p:sp>
       <p:sp>
         <p:nvSpPr>
@@ -3369,6 +3633,10 @@
           </a:solidFill>
           <a:ln/>
         </p:spPr>
+        <p:txBody>
+          <a:bodyPr/>
+          <a:p/>
+        </p:txBody>
       </p:sp>
       <p:pic>
         <p:nvPicPr>
@@ -3500,6 +3768,10 @@
             </a:outerShdw>
           </a:effectLst>
         </p:spPr>
+        <p:txBody>
+          <a:bodyPr/>
+          <a:p/>
+        </p:txBody>
       </p:sp>
       <p:sp>
         <p:nvSpPr>
@@ -3520,6 +3792,10 @@
           </a:solidFill>
           <a:ln/>
         </p:spPr>
+        <p:txBody>
+          <a:bodyPr/>
+          <a:p/>
+        </p:txBody>
       </p:sp>
       <p:pic>
         <p:nvPicPr>
@@ -3651,6 +3927,10 @@
             </a:outerShdw>
           </a:effectLst>
         </p:spPr>
+        <p:txBody>
+          <a:bodyPr/>
+          <a:p/>
+        </p:txBody>
       </p:sp>
       <p:sp>
         <p:nvSpPr>
@@ -3671,6 +3951,10 @@
           </a:solidFill>
           <a:ln/>
         </p:spPr>
+        <p:txBody>
+          <a:bodyPr/>
+          <a:p/>
+        </p:txBody>
       </p:sp>
       <p:pic>
         <p:nvPicPr>
@@ -3802,6 +4086,10 @@
             </a:outerShdw>
           </a:effectLst>
         </p:spPr>
+        <p:txBody>
+          <a:bodyPr/>
+          <a:p/>
+        </p:txBody>
       </p:sp>
       <p:sp>
         <p:nvSpPr>
@@ -3822,6 +4110,10 @@
           </a:solidFill>
           <a:ln/>
         </p:spPr>
+        <p:txBody>
+          <a:bodyPr/>
+          <a:p/>
+        </p:txBody>
       </p:sp>
       <p:pic>
         <p:nvPicPr>
@@ -3958,7 +4250,7 @@
                 <a:ea typeface="Calibri" pitchFamily="34" charset="-122"/>
                 <a:cs typeface="Calibri" pitchFamily="34" charset="-120"/>
               </a:rPr>
-              <a:t>10</a:t>
+              <a:t>11</a:t>
             </a:r>
             <a:endParaRPr lang="en-US" sz="1000" dirty="0"/>
           </a:p>
@@ -3972,7 +4264,231 @@
 </p:sld>
 </file>
 
-<file path=ppt/slides/slide11.xml><?xml version="1.0" encoding="utf-8"?>
+<file path=ppt/slides/slide12.xml><?xml version="1.0" encoding="utf-8"?>
+<p:sld xmlns:a="http://schemas.openxmlformats.org/drawingml/2006/main" xmlns:p="http://schemas.openxmlformats.org/presentationml/2006/main" xmlns:r="http://schemas.openxmlformats.org/officeDocument/2006/relationships">
+  <p:cSld>
+    <p:bg>
+      <p:bgPr>
+        <a:solidFill>
+          <a:srgbClr val="F4F7F9"/>
+        </a:solidFill>
+        <a:effectLst/>
+      </p:bgPr>
+    </p:bg>
+    <p:spTree>
+      <p:nvGrpSpPr>
+        <p:cNvPr id="1" name=""/>
+        <p:cNvGrpSpPr/>
+        <p:nvPr/>
+      </p:nvGrpSpPr>
+      <p:grpSpPr/>
+      <p:sp>
+        <p:nvSpPr>
+          <p:cNvPr id="2" name="TextBox 1"/>
+          <p:cNvSpPr txBox="1"/>
+          <p:nvPr/>
+        </p:nvSpPr>
+        <p:spPr>
+          <a:xfrm>
+            <a:off x="548640" y="411480"/>
+            <a:ext cx="10515600" cy="320040"/>
+          </a:xfrm>
+          <a:prstGeom prst="rect">
+            <a:avLst/>
+          </a:prstGeom>
+          <a:noFill/>
+        </p:spPr>
+        <p:txBody>
+          <a:bodyPr wrap="square">
+            <a:spAutoFit/>
+          </a:bodyPr>
+          <a:lstStyle/>
+          <a:p>
+            <a:pPr algn="l"/>
+            <a:r>
+              <a:rPr sz="1300" b="1" i="0">
+                <a:solidFill>
+                  <a:srgbClr val="F2A541"/>
+                </a:solidFill>
+                <a:latin typeface="Calibri"/>
+              </a:rPr>
+              <a:t>UN EXEMPLE REAL</a:t>
+            </a:r>
+          </a:p>
+        </p:txBody>
+      </p:sp>
+      <p:sp>
+        <p:nvSpPr>
+          <p:cNvPr id="3" name="TextBox 2"/>
+          <p:cNvSpPr txBox="1"/>
+          <p:nvPr/>
+        </p:nvSpPr>
+        <p:spPr>
+          <a:xfrm>
+            <a:off x="548640" y="685800"/>
+            <a:ext cx="10972800" cy="822960"/>
+          </a:xfrm>
+          <a:prstGeom prst="rect">
+            <a:avLst/>
+          </a:prstGeom>
+          <a:noFill/>
+        </p:spPr>
+        <p:txBody>
+          <a:bodyPr wrap="square">
+            <a:spAutoFit/>
+          </a:bodyPr>
+          <a:lstStyle/>
+          <a:p>
+            <a:pPr algn="l"/>
+            <a:r>
+              <a:rPr sz="2800" b="1" i="0">
+                <a:solidFill>
+                  <a:srgbClr val="16242E"/>
+                </a:solidFill>
+                <a:latin typeface="Cambria"/>
+              </a:rPr>
+              <a:t>SAI de la companyia APC (part posterior)</a:t>
+            </a:r>
+          </a:p>
+        </p:txBody>
+      </p:sp>
+      <p:sp>
+        <p:nvSpPr>
+          <p:cNvPr id="4" name="TextBox 3"/>
+          <p:cNvSpPr txBox="1"/>
+          <p:nvPr/>
+        </p:nvSpPr>
+        <p:spPr>
+          <a:xfrm>
+            <a:off x="548640" y="1417320"/>
+            <a:ext cx="10789920" cy="548640"/>
+          </a:xfrm>
+          <a:prstGeom prst="rect">
+            <a:avLst/>
+          </a:prstGeom>
+          <a:noFill/>
+        </p:spPr>
+        <p:txBody>
+          <a:bodyPr wrap="square">
+            <a:spAutoFit/>
+          </a:bodyPr>
+          <a:lstStyle/>
+          <a:p>
+            <a:pPr algn="l"/>
+            <a:r>
+              <a:rPr sz="1300" b="0" i="0">
+                <a:solidFill>
+                  <a:srgbClr val="5B6B77"/>
+                </a:solidFill>
+                <a:latin typeface="Calibri"/>
+              </a:rPr>
+              <a:t>S'hi veuen els connectors de sortida i l'interruptor principal.</a:t>
+            </a:r>
+          </a:p>
+        </p:txBody>
+      </p:sp>
+      <p:pic>
+        <p:nvPicPr>
+          <p:cNvPr id="5" name="Picture 4" descr="foto_sai_apc_darrere.png"/>
+          <p:cNvPicPr>
+            <a:picLocks noChangeAspect="1"/>
+          </p:cNvPicPr>
+          <p:nvPr/>
+        </p:nvPicPr>
+        <p:blipFill>
+          <a:blip r:embed="rId2"/>
+          <a:stretch>
+            <a:fillRect/>
+          </a:stretch>
+        </p:blipFill>
+        <p:spPr>
+          <a:xfrm>
+            <a:off x="4897558" y="1920240"/>
+            <a:ext cx="2396578" cy="4206240"/>
+          </a:xfrm>
+          <a:prstGeom prst="rect">
+            <a:avLst/>
+          </a:prstGeom>
+        </p:spPr>
+      </p:pic>
+      <p:sp>
+        <p:nvSpPr>
+          <p:cNvPr id="6" name="TextBox 5"/>
+          <p:cNvSpPr txBox="1"/>
+          <p:nvPr/>
+        </p:nvSpPr>
+        <p:spPr>
+          <a:xfrm>
+            <a:off x="548640" y="6263640"/>
+            <a:ext cx="11064240" cy="457200"/>
+          </a:xfrm>
+          <a:prstGeom prst="rect">
+            <a:avLst/>
+          </a:prstGeom>
+          <a:noFill/>
+        </p:spPr>
+        <p:txBody>
+          <a:bodyPr wrap="square">
+            <a:spAutoFit/>
+          </a:bodyPr>
+          <a:lstStyle/>
+          <a:p>
+            <a:pPr algn="ctr"/>
+            <a:r>
+              <a:rPr sz="1200" b="0" i="1">
+                <a:solidFill>
+                  <a:srgbClr val="5B6B77"/>
+                </a:solidFill>
+                <a:latin typeface="Calibri"/>
+              </a:rPr>
+              <a:t>SAI de la companyia APC (part posterior).</a:t>
+            </a:r>
+          </a:p>
+        </p:txBody>
+      </p:sp>
+      <p:sp>
+        <p:nvSpPr>
+          <p:cNvPr id="7" name="TextBox 6"/>
+          <p:cNvSpPr txBox="1"/>
+          <p:nvPr/>
+        </p:nvSpPr>
+        <p:spPr>
+          <a:xfrm>
+            <a:off x="11548872" y="6446520"/>
+            <a:ext cx="365760" cy="274320"/>
+          </a:xfrm>
+          <a:prstGeom prst="rect">
+            <a:avLst/>
+          </a:prstGeom>
+          <a:noFill/>
+        </p:spPr>
+        <p:txBody>
+          <a:bodyPr wrap="none">
+            <a:spAutoFit/>
+          </a:bodyPr>
+          <a:lstStyle/>
+          <a:p>
+            <a:pPr algn="r"/>
+            <a:r>
+              <a:rPr sz="1000">
+                <a:solidFill>
+                  <a:srgbClr val="5B6B77"/>
+                </a:solidFill>
+              </a:rPr>
+              <a:t>12</a:t>
+            </a:r>
+          </a:p>
+        </p:txBody>
+      </p:sp>
+    </p:spTree>
+  </p:cSld>
+  <p:clrMapOvr>
+    <a:masterClrMapping/>
+  </p:clrMapOvr>
+</p:sld>
+</file>
+
+<file path=ppt/slides/slide13.xml><?xml version="1.0" encoding="utf-8"?>
 <p:sld xmlns:a="http://schemas.openxmlformats.org/drawingml/2006/main" xmlns:r="http://schemas.openxmlformats.org/officeDocument/2006/relationships" xmlns:p="http://schemas.openxmlformats.org/presentationml/2006/main">
   <p:cSld name="Slide 11">
     <p:bg>
@@ -4102,6 +4618,10 @@
             </a:outerShdw>
           </a:effectLst>
         </p:spPr>
+        <p:txBody>
+          <a:bodyPr/>
+          <a:p/>
+        </p:txBody>
       </p:sp>
       <p:sp>
         <p:nvSpPr>
@@ -4122,6 +4642,10 @@
           </a:solidFill>
           <a:ln/>
         </p:spPr>
+        <p:txBody>
+          <a:bodyPr/>
+          <a:p/>
+        </p:txBody>
       </p:sp>
       <p:pic>
         <p:nvPicPr>
@@ -4253,6 +4777,10 @@
             </a:outerShdw>
           </a:effectLst>
         </p:spPr>
+        <p:txBody>
+          <a:bodyPr/>
+          <a:p/>
+        </p:txBody>
       </p:sp>
       <p:sp>
         <p:nvSpPr>
@@ -4273,6 +4801,10 @@
           </a:solidFill>
           <a:ln/>
         </p:spPr>
+        <p:txBody>
+          <a:bodyPr/>
+          <a:p/>
+        </p:txBody>
       </p:sp>
       <p:pic>
         <p:nvPicPr>
@@ -4404,6 +4936,10 @@
             </a:outerShdw>
           </a:effectLst>
         </p:spPr>
+        <p:txBody>
+          <a:bodyPr/>
+          <a:p/>
+        </p:txBody>
       </p:sp>
       <p:sp>
         <p:nvSpPr>
@@ -4424,6 +4960,10 @@
           </a:solidFill>
           <a:ln/>
         </p:spPr>
+        <p:txBody>
+          <a:bodyPr/>
+          <a:p/>
+        </p:txBody>
       </p:sp>
       <p:pic>
         <p:nvPicPr>
@@ -4555,6 +5095,10 @@
             </a:outerShdw>
           </a:effectLst>
         </p:spPr>
+        <p:txBody>
+          <a:bodyPr/>
+          <a:p/>
+        </p:txBody>
       </p:sp>
       <p:sp>
         <p:nvSpPr>
@@ -4575,6 +5119,10 @@
           </a:solidFill>
           <a:ln/>
         </p:spPr>
+        <p:txBody>
+          <a:bodyPr/>
+          <a:p/>
+        </p:txBody>
       </p:sp>
       <p:pic>
         <p:nvPicPr>
@@ -4750,7 +5298,7 @@
                 <a:ea typeface="Calibri" pitchFamily="34" charset="-122"/>
                 <a:cs typeface="Calibri" pitchFamily="34" charset="-120"/>
               </a:rPr>
-              <a:t>11</a:t>
+              <a:t>13</a:t>
             </a:r>
             <a:endParaRPr lang="en-US" sz="1000" dirty="0"/>
           </a:p>
@@ -4764,7 +5312,7 @@
 </p:sld>
 </file>
 
-<file path=ppt/slides/slide12.xml><?xml version="1.0" encoding="utf-8"?>
+<file path=ppt/slides/slide14.xml><?xml version="1.0" encoding="utf-8"?>
 <p:sld xmlns:a="http://schemas.openxmlformats.org/drawingml/2006/main" xmlns:r="http://schemas.openxmlformats.org/officeDocument/2006/relationships" xmlns:p="http://schemas.openxmlformats.org/presentationml/2006/main">
   <p:cSld name="Slide 12">
     <p:bg>
@@ -4887,6 +5435,10 @@
           </a:solidFill>
           <a:ln/>
         </p:spPr>
+        <p:txBody>
+          <a:bodyPr/>
+          <a:p/>
+        </p:txBody>
       </p:sp>
       <p:sp>
         <p:nvSpPr>
@@ -4907,6 +5459,10 @@
           </a:solidFill>
           <a:ln/>
         </p:spPr>
+        <p:txBody>
+          <a:bodyPr/>
+          <a:p/>
+        </p:txBody>
       </p:sp>
       <p:pic>
         <p:nvPicPr>
@@ -5031,6 +5587,10 @@
           </a:solidFill>
           <a:ln/>
         </p:spPr>
+        <p:txBody>
+          <a:bodyPr/>
+          <a:p/>
+        </p:txBody>
       </p:sp>
       <p:sp>
         <p:nvSpPr>
@@ -5051,6 +5611,10 @@
           </a:solidFill>
           <a:ln/>
         </p:spPr>
+        <p:txBody>
+          <a:bodyPr/>
+          <a:p/>
+        </p:txBody>
       </p:sp>
       <p:pic>
         <p:nvPicPr>
@@ -5175,6 +5739,10 @@
           </a:solidFill>
           <a:ln/>
         </p:spPr>
+        <p:txBody>
+          <a:bodyPr/>
+          <a:p/>
+        </p:txBody>
       </p:sp>
       <p:sp>
         <p:nvSpPr>
@@ -5195,6 +5763,10 @@
           </a:solidFill>
           <a:ln/>
         </p:spPr>
+        <p:txBody>
+          <a:bodyPr/>
+          <a:p/>
+        </p:txBody>
       </p:sp>
       <p:pic>
         <p:nvPicPr>
@@ -5319,6 +5891,10 @@
           </a:solidFill>
           <a:ln/>
         </p:spPr>
+        <p:txBody>
+          <a:bodyPr/>
+          <a:p/>
+        </p:txBody>
       </p:sp>
       <p:sp>
         <p:nvSpPr>
@@ -5339,6 +5915,10 @@
           </a:solidFill>
           <a:ln/>
         </p:spPr>
+        <p:txBody>
+          <a:bodyPr/>
+          <a:p/>
+        </p:txBody>
       </p:sp>
       <p:pic>
         <p:nvPicPr>
@@ -5463,6 +6043,10 @@
           </a:solidFill>
           <a:ln/>
         </p:spPr>
+        <p:txBody>
+          <a:bodyPr/>
+          <a:p/>
+        </p:txBody>
       </p:sp>
       <p:sp>
         <p:nvSpPr>
@@ -5483,6 +6067,10 @@
           </a:solidFill>
           <a:ln/>
         </p:spPr>
+        <p:txBody>
+          <a:bodyPr/>
+          <a:p/>
+        </p:txBody>
       </p:sp>
       <p:pic>
         <p:nvPicPr>
@@ -5658,7 +6246,7 @@
                 <a:ea typeface="Calibri" pitchFamily="34" charset="-122"/>
                 <a:cs typeface="Calibri" pitchFamily="34" charset="-120"/>
               </a:rPr>
-              <a:t>12</a:t>
+              <a:t>14</a:t>
             </a:r>
             <a:endParaRPr lang="en-US" sz="1000" dirty="0"/>
           </a:p>
@@ -5672,7 +6260,7 @@
 </p:sld>
 </file>
 
-<file path=ppt/slides/slide13.xml><?xml version="1.0" encoding="utf-8"?>
+<file path=ppt/slides/slide15.xml><?xml version="1.0" encoding="utf-8"?>
 <p:sld xmlns:a="http://schemas.openxmlformats.org/drawingml/2006/main" xmlns:r="http://schemas.openxmlformats.org/officeDocument/2006/relationships" xmlns:p="http://schemas.openxmlformats.org/presentationml/2006/main">
   <p:cSld name="Slide 13">
     <p:bg>
@@ -5795,6 +6383,10 @@
           </a:solidFill>
           <a:ln/>
         </p:spPr>
+        <p:txBody>
+          <a:bodyPr/>
+          <a:p/>
+        </p:txBody>
       </p:sp>
       <p:sp>
         <p:nvSpPr>
@@ -5934,6 +6526,10 @@
           </a:solidFill>
           <a:ln/>
         </p:spPr>
+        <p:txBody>
+          <a:bodyPr/>
+          <a:p/>
+        </p:txBody>
       </p:sp>
       <p:sp>
         <p:nvSpPr>
@@ -6073,6 +6669,10 @@
           </a:solidFill>
           <a:ln/>
         </p:spPr>
+        <p:txBody>
+          <a:bodyPr/>
+          <a:p/>
+        </p:txBody>
       </p:sp>
       <p:sp>
         <p:nvSpPr>
@@ -6224,7 +6824,7 @@
                 <a:ea typeface="Calibri" pitchFamily="34" charset="-122"/>
                 <a:cs typeface="Calibri" pitchFamily="34" charset="-120"/>
               </a:rPr>
-              <a:t>13</a:t>
+              <a:t>15</a:t>
             </a:r>
             <a:endParaRPr lang="en-US" sz="1000" dirty="0"/>
           </a:p>
@@ -6238,7 +6838,7 @@
 </p:sld>
 </file>
 
-<file path=ppt/slides/slide14.xml><?xml version="1.0" encoding="utf-8"?>
+<file path=ppt/slides/slide16.xml><?xml version="1.0" encoding="utf-8"?>
 <p:sld xmlns:a="http://schemas.openxmlformats.org/drawingml/2006/main" xmlns:r="http://schemas.openxmlformats.org/officeDocument/2006/relationships" xmlns:p="http://schemas.openxmlformats.org/presentationml/2006/main">
   <p:cSld name="Slide 14">
     <p:bg>
@@ -6366,6 +6966,10 @@
             <a:prstDash val="solid"/>
           </a:ln>
         </p:spPr>
+        <p:txBody>
+          <a:bodyPr/>
+          <a:p/>
+        </p:txBody>
       </p:sp>
       <p:sp>
         <p:nvSpPr>
@@ -6386,6 +6990,10 @@
           </a:solidFill>
           <a:ln/>
         </p:spPr>
+        <p:txBody>
+          <a:bodyPr/>
+          <a:p/>
+        </p:txBody>
       </p:sp>
       <p:pic>
         <p:nvPicPr>
@@ -6510,6 +7118,10 @@
           </a:solidFill>
           <a:ln/>
         </p:spPr>
+        <p:txBody>
+          <a:bodyPr/>
+          <a:p/>
+        </p:txBody>
       </p:sp>
       <p:sp>
         <p:nvSpPr>
@@ -6530,6 +7142,10 @@
           </a:solidFill>
           <a:ln/>
         </p:spPr>
+        <p:txBody>
+          <a:bodyPr/>
+          <a:p/>
+        </p:txBody>
       </p:sp>
       <p:pic>
         <p:nvPicPr>
@@ -6666,7 +7282,7 @@
                 <a:ea typeface="Calibri" pitchFamily="34" charset="-122"/>
                 <a:cs typeface="Calibri" pitchFamily="34" charset="-120"/>
               </a:rPr>
-              <a:t>14</a:t>
+              <a:t>16</a:t>
             </a:r>
             <a:endParaRPr lang="en-US" sz="1000" dirty="0"/>
           </a:p>
@@ -6680,7 +7296,196 @@
 </p:sld>
 </file>
 
-<file path=ppt/slides/slide15.xml><?xml version="1.0" encoding="utf-8"?>
+<file path=ppt/slides/slide17.xml><?xml version="1.0" encoding="utf-8"?>
+<p:sld xmlns:a="http://schemas.openxmlformats.org/drawingml/2006/main" xmlns:p="http://schemas.openxmlformats.org/presentationml/2006/main" xmlns:r="http://schemas.openxmlformats.org/officeDocument/2006/relationships">
+  <p:cSld>
+    <p:bg>
+      <p:bgPr>
+        <a:solidFill>
+          <a:srgbClr val="F4F7F9"/>
+        </a:solidFill>
+        <a:effectLst/>
+      </p:bgPr>
+    </p:bg>
+    <p:spTree>
+      <p:nvGrpSpPr>
+        <p:cNvPr id="1" name=""/>
+        <p:cNvGrpSpPr/>
+        <p:nvPr/>
+      </p:nvGrpSpPr>
+      <p:grpSpPr/>
+      <p:sp>
+        <p:nvSpPr>
+          <p:cNvPr id="2" name="TextBox 1"/>
+          <p:cNvSpPr txBox="1"/>
+          <p:nvPr/>
+        </p:nvSpPr>
+        <p:spPr>
+          <a:xfrm>
+            <a:off x="548640" y="411480"/>
+            <a:ext cx="10515600" cy="320040"/>
+          </a:xfrm>
+          <a:prstGeom prst="rect">
+            <a:avLst/>
+          </a:prstGeom>
+          <a:noFill/>
+        </p:spPr>
+        <p:txBody>
+          <a:bodyPr wrap="square">
+            <a:spAutoFit/>
+          </a:bodyPr>
+          <a:lstStyle/>
+          <a:p>
+            <a:pPr algn="l"/>
+            <a:r>
+              <a:rPr sz="1300" b="1" i="0">
+                <a:solidFill>
+                  <a:srgbClr val="F2A541"/>
+                </a:solidFill>
+                <a:latin typeface="Calibri"/>
+              </a:rPr>
+              <a:t>SOTA EL CAPÓ</a:t>
+            </a:r>
+          </a:p>
+        </p:txBody>
+      </p:sp>
+      <p:sp>
+        <p:nvSpPr>
+          <p:cNvPr id="3" name="TextBox 2"/>
+          <p:cNvSpPr txBox="1"/>
+          <p:nvPr/>
+        </p:nvSpPr>
+        <p:spPr>
+          <a:xfrm>
+            <a:off x="548640" y="685800"/>
+            <a:ext cx="10972800" cy="822960"/>
+          </a:xfrm>
+          <a:prstGeom prst="rect">
+            <a:avLst/>
+          </a:prstGeom>
+          <a:noFill/>
+        </p:spPr>
+        <p:txBody>
+          <a:bodyPr wrap="square">
+            <a:spAutoFit/>
+          </a:bodyPr>
+          <a:lstStyle/>
+          <a:p>
+            <a:pPr algn="l"/>
+            <a:r>
+              <a:rPr sz="2800" b="1" i="0">
+                <a:solidFill>
+                  <a:srgbClr val="16242E"/>
+                </a:solidFill>
+                <a:latin typeface="Cambria"/>
+              </a:rPr>
+              <a:t>Tipus de SAI: el “temps de transferència”</a:t>
+            </a:r>
+          </a:p>
+        </p:txBody>
+      </p:sp>
+      <p:pic>
+        <p:nvPicPr>
+          <p:cNvPr id="4" name="Picture 3" descr="sai_tipus_transferencia.png"/>
+          <p:cNvPicPr>
+            <a:picLocks noChangeAspect="1"/>
+          </p:cNvPicPr>
+          <p:nvPr/>
+        </p:nvPicPr>
+        <p:blipFill>
+          <a:blip r:embed="rId2"/>
+          <a:stretch>
+            <a:fillRect/>
+          </a:stretch>
+        </p:blipFill>
+        <p:spPr>
+          <a:xfrm>
+            <a:off x="2290201" y="1920240"/>
+            <a:ext cx="7611291" cy="4206240"/>
+          </a:xfrm>
+          <a:prstGeom prst="rect">
+            <a:avLst/>
+          </a:prstGeom>
+        </p:spPr>
+      </p:pic>
+      <p:sp>
+        <p:nvSpPr>
+          <p:cNvPr id="5" name="TextBox 4"/>
+          <p:cNvSpPr txBox="1"/>
+          <p:nvPr/>
+        </p:nvSpPr>
+        <p:spPr>
+          <a:xfrm>
+            <a:off x="548640" y="6263640"/>
+            <a:ext cx="11064240" cy="457200"/>
+          </a:xfrm>
+          <a:prstGeom prst="rect">
+            <a:avLst/>
+          </a:prstGeom>
+          <a:noFill/>
+        </p:spPr>
+        <p:txBody>
+          <a:bodyPr wrap="square">
+            <a:spAutoFit/>
+          </a:bodyPr>
+          <a:lstStyle/>
+          <a:p>
+            <a:pPr algn="ctr"/>
+            <a:r>
+              <a:rPr sz="1200" b="0" i="1">
+                <a:solidFill>
+                  <a:srgbClr val="5B6B77"/>
+                </a:solidFill>
+                <a:latin typeface="Calibri"/>
+              </a:rPr>
+              <a:t>Com més curt el temps de transferència, més robusta la protecció: el SAI online no en té gens.</a:t>
+            </a:r>
+          </a:p>
+        </p:txBody>
+      </p:sp>
+      <p:sp>
+        <p:nvSpPr>
+          <p:cNvPr id="6" name="TextBox 5"/>
+          <p:cNvSpPr txBox="1"/>
+          <p:nvPr/>
+        </p:nvSpPr>
+        <p:spPr>
+          <a:xfrm>
+            <a:off x="11548872" y="6446520"/>
+            <a:ext cx="365760" cy="274320"/>
+          </a:xfrm>
+          <a:prstGeom prst="rect">
+            <a:avLst/>
+          </a:prstGeom>
+          <a:noFill/>
+        </p:spPr>
+        <p:txBody>
+          <a:bodyPr wrap="none">
+            <a:spAutoFit/>
+          </a:bodyPr>
+          <a:lstStyle/>
+          <a:p>
+            <a:pPr algn="r"/>
+            <a:r>
+              <a:rPr sz="1000">
+                <a:solidFill>
+                  <a:srgbClr val="5B6B77"/>
+                </a:solidFill>
+              </a:rPr>
+              <a:t>17</a:t>
+            </a:r>
+          </a:p>
+        </p:txBody>
+      </p:sp>
+    </p:spTree>
+  </p:cSld>
+  <p:clrMapOvr>
+    <a:masterClrMapping/>
+  </p:clrMapOvr>
+</p:sld>
+</file>
+
+<file path=ppt/slides/slide18.xml><?xml version="1.0" encoding="utf-8"?>
 <p:sld xmlns:a="http://schemas.openxmlformats.org/drawingml/2006/main" xmlns:r="http://schemas.openxmlformats.org/officeDocument/2006/relationships" xmlns:p="http://schemas.openxmlformats.org/presentationml/2006/main">
   <p:cSld name="Slide 15">
     <p:bg>
@@ -6803,6 +7608,10 @@
           </a:solidFill>
           <a:ln/>
         </p:spPr>
+        <p:txBody>
+          <a:bodyPr/>
+          <a:p/>
+        </p:txBody>
       </p:sp>
       <p:sp>
         <p:nvSpPr>
@@ -6903,6 +7712,10 @@
           </a:solidFill>
           <a:ln/>
         </p:spPr>
+        <p:txBody>
+          <a:bodyPr/>
+          <a:p/>
+        </p:txBody>
       </p:sp>
       <p:sp>
         <p:nvSpPr>
@@ -7003,6 +7816,10 @@
           </a:solidFill>
           <a:ln/>
         </p:spPr>
+        <p:txBody>
+          <a:bodyPr/>
+          <a:p/>
+        </p:txBody>
       </p:sp>
       <p:sp>
         <p:nvSpPr>
@@ -7869,6 +8686,10 @@
             </a:outerShdw>
           </a:effectLst>
         </p:spPr>
+        <p:txBody>
+          <a:bodyPr/>
+          <a:p/>
+        </p:txBody>
       </p:sp>
       <p:sp>
         <p:nvSpPr>
@@ -7981,7 +8802,7 @@
                 <a:ea typeface="Calibri" pitchFamily="34" charset="-122"/>
                 <a:cs typeface="Calibri" pitchFamily="34" charset="-120"/>
               </a:rPr>
-              <a:t>15</a:t>
+              <a:t>18</a:t>
             </a:r>
             <a:endParaRPr lang="en-US" sz="1000" dirty="0"/>
           </a:p>
@@ -7995,7 +8816,7 @@
 </p:sld>
 </file>
 
-<file path=ppt/slides/slide16.xml><?xml version="1.0" encoding="utf-8"?>
+<file path=ppt/slides/slide19.xml><?xml version="1.0" encoding="utf-8"?>
 <p:sld xmlns:a="http://schemas.openxmlformats.org/drawingml/2006/main" xmlns:r="http://schemas.openxmlformats.org/officeDocument/2006/relationships" xmlns:p="http://schemas.openxmlformats.org/presentationml/2006/main">
   <p:cSld name="Slide 16">
     <p:bg>
@@ -8118,6 +8939,10 @@
           </a:solidFill>
           <a:ln/>
         </p:spPr>
+        <p:txBody>
+          <a:bodyPr/>
+          <a:p/>
+        </p:txBody>
       </p:sp>
       <p:sp>
         <p:nvSpPr>
@@ -8218,6 +9043,10 @@
           </a:solidFill>
           <a:ln/>
         </p:spPr>
+        <p:txBody>
+          <a:bodyPr/>
+          <a:p/>
+        </p:txBody>
       </p:sp>
       <p:sp>
         <p:nvSpPr>
@@ -8318,6 +9147,10 @@
           </a:solidFill>
           <a:ln/>
         </p:spPr>
+        <p:txBody>
+          <a:bodyPr/>
+          <a:p/>
+        </p:txBody>
       </p:sp>
       <p:sp>
         <p:nvSpPr>
@@ -8338,6 +9171,10 @@
           </a:solidFill>
           <a:ln/>
         </p:spPr>
+        <p:txBody>
+          <a:bodyPr/>
+          <a:p/>
+        </p:txBody>
       </p:sp>
       <p:pic>
         <p:nvPicPr>
@@ -8474,1473 +9311,9 @@
                 <a:ea typeface="Calibri" pitchFamily="34" charset="-122"/>
                 <a:cs typeface="Calibri" pitchFamily="34" charset="-120"/>
               </a:rPr>
-              <a:t>16</a:t>
+              <a:t>19</a:t>
             </a:r>
             <a:endParaRPr lang="en-US" sz="1000" dirty="0"/>
-          </a:p>
-        </p:txBody>
-      </p:sp>
-    </p:spTree>
-  </p:cSld>
-  <p:clrMapOvr>
-    <a:masterClrMapping/>
-  </p:clrMapOvr>
-</p:sld>
-</file>
-
-<file path=ppt/slides/slide17.xml><?xml version="1.0" encoding="utf-8"?>
-<p:sld xmlns:a="http://schemas.openxmlformats.org/drawingml/2006/main" xmlns:r="http://schemas.openxmlformats.org/officeDocument/2006/relationships" xmlns:p="http://schemas.openxmlformats.org/presentationml/2006/main">
-  <p:cSld name="Slide 17">
-    <p:bg>
-      <p:bgPr>
-        <a:solidFill>
-          <a:srgbClr val="F4F7F9"/>
-        </a:solidFill>
-      </p:bgPr>
-    </p:bg>
-    <p:spTree>
-      <p:nvGrpSpPr>
-        <p:cNvPr id="1" name=""/>
-        <p:cNvGrpSpPr/>
-        <p:nvPr/>
-      </p:nvGrpSpPr>
-      <p:grpSpPr>
-        <a:xfrm>
-          <a:off x="0" y="0"/>
-          <a:ext cx="0" cy="0"/>
-          <a:chOff x="0" y="0"/>
-          <a:chExt cx="0" cy="0"/>
-        </a:xfrm>
-      </p:grpSpPr>
-      <p:sp>
-        <p:nvSpPr>
-          <p:cNvPr id="2" name="Text 0"/>
-          <p:cNvSpPr txBox="1"/>
-          <p:nvPr/>
-        </p:nvSpPr>
-        <p:spPr>
-          <a:xfrm>
-            <a:off x="548640" y="411480"/>
-            <a:ext cx="7315200" cy="320040"/>
-          </a:xfrm>
-          <a:prstGeom prst="rect">
-            <a:avLst/>
-          </a:prstGeom>
-          <a:noFill/>
-          <a:ln/>
-        </p:spPr>
-        <p:txBody>
-          <a:bodyPr wrap="square" lIns="0" tIns="0" rIns="0" bIns="0" rtlCol="0" anchor="ctr"/>
-          <a:lstStyle/>
-          <a:p>
-            <a:pPr indent="0" marL="0">
-              <a:buNone/>
-            </a:pPr>
-            <a:r>
-              <a:rPr lang="en-US" sz="1300" b="1" spc="200" kern="0" dirty="0">
-                <a:solidFill>
-                  <a:srgbClr val="F2A541"/>
-                </a:solidFill>
-                <a:latin typeface="Calibri" pitchFamily="34" charset="0"/>
-                <a:ea typeface="Calibri" pitchFamily="34" charset="-122"/>
-                <a:cs typeface="Calibri" pitchFamily="34" charset="-120"/>
-              </a:rPr>
-              <a:t>A L'HORA DE DECIDIR</a:t>
-            </a:r>
-            <a:endParaRPr lang="en-US" sz="1300" dirty="0"/>
-          </a:p>
-        </p:txBody>
-      </p:sp>
-      <p:sp>
-        <p:nvSpPr>
-          <p:cNvPr id="3" name="Text 1"/>
-          <p:cNvSpPr txBox="1"/>
-          <p:nvPr/>
-        </p:nvSpPr>
-        <p:spPr>
-          <a:xfrm>
-            <a:off x="548640" y="685800"/>
-            <a:ext cx="9144000" cy="822960"/>
-          </a:xfrm>
-          <a:prstGeom prst="rect">
-            <a:avLst/>
-          </a:prstGeom>
-          <a:noFill/>
-          <a:ln/>
-        </p:spPr>
-        <p:txBody>
-          <a:bodyPr wrap="square" lIns="0" tIns="0" rIns="0" bIns="0" rtlCol="0" anchor="ctr"/>
-          <a:lstStyle/>
-          <a:p>
-            <a:pPr indent="0" marL="0">
-              <a:buNone/>
-            </a:pPr>
-            <a:r>
-              <a:rPr lang="en-US" sz="3200" b="1" dirty="0">
-                <a:solidFill>
-                  <a:srgbClr val="16242E"/>
-                </a:solidFill>
-                <a:latin typeface="Cambria" pitchFamily="34" charset="0"/>
-                <a:ea typeface="Cambria" pitchFamily="34" charset="-122"/>
-                <a:cs typeface="Cambria" pitchFamily="34" charset="-120"/>
-              </a:rPr>
-              <a:t>Escollir i ubicar el SAI</a:t>
-            </a:r>
-            <a:endParaRPr lang="en-US" sz="3200" dirty="0"/>
-          </a:p>
-        </p:txBody>
-      </p:sp>
-      <p:sp>
-        <p:nvSpPr>
-          <p:cNvPr id="4" name="Shape 2"/>
-          <p:cNvSpPr/>
-          <p:nvPr/>
-        </p:nvSpPr>
-        <p:spPr>
-          <a:xfrm>
-            <a:off x="548640" y="1920240"/>
-            <a:ext cx="3383280" cy="2286000"/>
-          </a:xfrm>
-          <a:prstGeom prst="roundRect">
-            <a:avLst>
-              <a:gd name="adj" fmla="val 4800"/>
-            </a:avLst>
-          </a:prstGeom>
-          <a:solidFill>
-            <a:srgbClr val="FFFFFF"/>
-          </a:solidFill>
-          <a:ln/>
-          <a:effectLst>
-            <a:outerShdw sx="100000" sy="100000" kx="0" ky="0" algn="bl" rotWithShape="0" blurRad="76200" dist="25400" dir="5400000">
-              <a:srgbClr val="1B2A38">
-                <a:alpha val="12000"/>
-              </a:srgbClr>
-            </a:outerShdw>
-          </a:effectLst>
-        </p:spPr>
-      </p:sp>
-      <p:sp>
-        <p:nvSpPr>
-          <p:cNvPr id="5" name="Shape 3"/>
-          <p:cNvSpPr/>
-          <p:nvPr/>
-        </p:nvSpPr>
-        <p:spPr>
-          <a:xfrm>
-            <a:off x="1828800" y="2148840"/>
-            <a:ext cx="822960" cy="822960"/>
-          </a:xfrm>
-          <a:prstGeom prst="ellipse">
-            <a:avLst/>
-          </a:prstGeom>
-          <a:solidFill>
-            <a:srgbClr val="3E6680"/>
-          </a:solidFill>
-          <a:ln/>
-        </p:spPr>
-      </p:sp>
-      <p:pic>
-        <p:nvPicPr>
-          <p:cNvPr id="6" name="Image 0" descr="/home/claude/pptx_build/icons/weight.png">    </p:cNvPr>
-          <p:cNvPicPr>
-            <a:picLocks noChangeAspect="1"/>
-          </p:cNvPicPr>
-          <p:nvPr/>
-        </p:nvPicPr>
-        <p:blipFill>
-          <a:blip r:embed="rId1"/>
-          <a:stretch>
-            <a:fillRect/>
-          </a:stretch>
-        </p:blipFill>
-        <p:spPr>
-          <a:xfrm>
-            <a:off x="2034540" y="2354580"/>
-            <a:ext cx="411480" cy="411480"/>
-          </a:xfrm>
-          <a:prstGeom prst="rect">
-            <a:avLst/>
-          </a:prstGeom>
-        </p:spPr>
-      </p:pic>
-      <p:sp>
-        <p:nvSpPr>
-          <p:cNvPr id="7" name="Text 4"/>
-          <p:cNvSpPr txBox="1"/>
-          <p:nvPr/>
-        </p:nvSpPr>
-        <p:spPr>
-          <a:xfrm>
-            <a:off x="731520" y="3063240"/>
-            <a:ext cx="3017520" cy="548640"/>
-          </a:xfrm>
-          <a:prstGeom prst="rect">
-            <a:avLst/>
-          </a:prstGeom>
-          <a:noFill/>
-          <a:ln/>
-        </p:spPr>
-        <p:txBody>
-          <a:bodyPr wrap="square" lIns="0" tIns="0" rIns="0" bIns="0" rtlCol="0" anchor="ctr"/>
-          <a:lstStyle/>
-          <a:p>
-            <a:pPr algn="ctr" indent="0" marL="0">
-              <a:buNone/>
-            </a:pPr>
-            <a:r>
-              <a:rPr lang="en-US" sz="1300" b="1" dirty="0">
-                <a:solidFill>
-                  <a:srgbClr val="16242E"/>
-                </a:solidFill>
-                <a:latin typeface="Cambria" pitchFamily="34" charset="0"/>
-                <a:ea typeface="Cambria" pitchFamily="34" charset="-122"/>
-                <a:cs typeface="Cambria" pitchFamily="34" charset="-120"/>
-              </a:rPr>
-              <a:t>Quina càrrega haurà de suportar?</a:t>
-            </a:r>
-            <a:endParaRPr lang="en-US" sz="1300" dirty="0"/>
-          </a:p>
-        </p:txBody>
-      </p:sp>
-      <p:sp>
-        <p:nvSpPr>
-          <p:cNvPr id="8" name="Text 5"/>
-          <p:cNvSpPr txBox="1"/>
-          <p:nvPr/>
-        </p:nvSpPr>
-        <p:spPr>
-          <a:xfrm>
-            <a:off x="777240" y="3611880"/>
-            <a:ext cx="2926080" cy="548640"/>
-          </a:xfrm>
-          <a:prstGeom prst="rect">
-            <a:avLst/>
-          </a:prstGeom>
-          <a:noFill/>
-          <a:ln/>
-        </p:spPr>
-        <p:txBody>
-          <a:bodyPr wrap="square" lIns="0" tIns="0" rIns="0" bIns="0" rtlCol="0" anchor="ctr"/>
-          <a:lstStyle/>
-          <a:p>
-            <a:pPr algn="ctr" indent="0" marL="0">
-              <a:buNone/>
-            </a:pPr>
-            <a:r>
-              <a:rPr lang="en-US" sz="1100" dirty="0">
-                <a:solidFill>
-                  <a:srgbClr val="5B6B77"/>
-                </a:solidFill>
-                <a:latin typeface="Calibri" pitchFamily="34" charset="0"/>
-                <a:ea typeface="Calibri" pitchFamily="34" charset="-122"/>
-                <a:cs typeface="Calibri" pitchFamily="34" charset="-120"/>
-              </a:rPr>
-              <a:t>Suma la potència real (W) de tots els equips a protegir.</a:t>
-            </a:r>
-            <a:endParaRPr lang="en-US" sz="1100" dirty="0"/>
-          </a:p>
-        </p:txBody>
-      </p:sp>
-      <p:sp>
-        <p:nvSpPr>
-          <p:cNvPr id="9" name="Shape 6"/>
-          <p:cNvSpPr/>
-          <p:nvPr/>
-        </p:nvSpPr>
-        <p:spPr>
-          <a:xfrm>
-            <a:off x="4251960" y="1920240"/>
-            <a:ext cx="3383280" cy="2286000"/>
-          </a:xfrm>
-          <a:prstGeom prst="roundRect">
-            <a:avLst>
-              <a:gd name="adj" fmla="val 4800"/>
-            </a:avLst>
-          </a:prstGeom>
-          <a:solidFill>
-            <a:srgbClr val="FFFFFF"/>
-          </a:solidFill>
-          <a:ln/>
-          <a:effectLst>
-            <a:outerShdw sx="100000" sy="100000" kx="0" ky="0" algn="bl" rotWithShape="0" blurRad="76200" dist="25400" dir="5400000">
-              <a:srgbClr val="1B2A38">
-                <a:alpha val="12000"/>
-              </a:srgbClr>
-            </a:outerShdw>
-          </a:effectLst>
-        </p:spPr>
-      </p:sp>
-      <p:sp>
-        <p:nvSpPr>
-          <p:cNvPr id="10" name="Shape 7"/>
-          <p:cNvSpPr/>
-          <p:nvPr/>
-        </p:nvSpPr>
-        <p:spPr>
-          <a:xfrm>
-            <a:off x="5532120" y="2148840"/>
-            <a:ext cx="822960" cy="822960"/>
-          </a:xfrm>
-          <a:prstGeom prst="ellipse">
-            <a:avLst/>
-          </a:prstGeom>
-          <a:solidFill>
-            <a:srgbClr val="3E6680"/>
-          </a:solidFill>
-          <a:ln/>
-        </p:spPr>
-      </p:sp>
-      <p:pic>
-        <p:nvPicPr>
-          <p:cNvPr id="11" name="Image 1" descr="/home/claude/pptx_build/icons/clock.png">    </p:cNvPr>
-          <p:cNvPicPr>
-            <a:picLocks noChangeAspect="1"/>
-          </p:cNvPicPr>
-          <p:nvPr/>
-        </p:nvPicPr>
-        <p:blipFill>
-          <a:blip r:embed="rId2"/>
-          <a:stretch>
-            <a:fillRect/>
-          </a:stretch>
-        </p:blipFill>
-        <p:spPr>
-          <a:xfrm>
-            <a:off x="5737860" y="2354580"/>
-            <a:ext cx="411480" cy="411480"/>
-          </a:xfrm>
-          <a:prstGeom prst="rect">
-            <a:avLst/>
-          </a:prstGeom>
-        </p:spPr>
-      </p:pic>
-      <p:sp>
-        <p:nvSpPr>
-          <p:cNvPr id="12" name="Text 8"/>
-          <p:cNvSpPr txBox="1"/>
-          <p:nvPr/>
-        </p:nvSpPr>
-        <p:spPr>
-          <a:xfrm>
-            <a:off x="4434840" y="3063240"/>
-            <a:ext cx="3017520" cy="548640"/>
-          </a:xfrm>
-          <a:prstGeom prst="rect">
-            <a:avLst/>
-          </a:prstGeom>
-          <a:noFill/>
-          <a:ln/>
-        </p:spPr>
-        <p:txBody>
-          <a:bodyPr wrap="square" lIns="0" tIns="0" rIns="0" bIns="0" rtlCol="0" anchor="ctr"/>
-          <a:lstStyle/>
-          <a:p>
-            <a:pPr algn="ctr" indent="0" marL="0">
-              <a:buNone/>
-            </a:pPr>
-            <a:r>
-              <a:rPr lang="en-US" sz="1300" b="1" dirty="0">
-                <a:solidFill>
-                  <a:srgbClr val="16242E"/>
-                </a:solidFill>
-                <a:latin typeface="Cambria" pitchFamily="34" charset="0"/>
-                <a:ea typeface="Cambria" pitchFamily="34" charset="-122"/>
-                <a:cs typeface="Cambria" pitchFamily="34" charset="-120"/>
-              </a:rPr>
-              <a:t>Quanta autonomia vols?</a:t>
-            </a:r>
-            <a:endParaRPr lang="en-US" sz="1300" dirty="0"/>
-          </a:p>
-        </p:txBody>
-      </p:sp>
-      <p:sp>
-        <p:nvSpPr>
-          <p:cNvPr id="13" name="Text 9"/>
-          <p:cNvSpPr txBox="1"/>
-          <p:nvPr/>
-        </p:nvSpPr>
-        <p:spPr>
-          <a:xfrm>
-            <a:off x="4480560" y="3611880"/>
-            <a:ext cx="2926080" cy="548640"/>
-          </a:xfrm>
-          <a:prstGeom prst="rect">
-            <a:avLst/>
-          </a:prstGeom>
-          <a:noFill/>
-          <a:ln/>
-        </p:spPr>
-        <p:txBody>
-          <a:bodyPr wrap="square" lIns="0" tIns="0" rIns="0" bIns="0" rtlCol="0" anchor="ctr"/>
-          <a:lstStyle/>
-          <a:p>
-            <a:pPr algn="ctr" indent="0" marL="0">
-              <a:buNone/>
-            </a:pPr>
-            <a:r>
-              <a:rPr lang="en-US" sz="1100" dirty="0">
-                <a:solidFill>
-                  <a:srgbClr val="5B6B77"/>
-                </a:solidFill>
-                <a:latin typeface="Calibri" pitchFamily="34" charset="0"/>
-                <a:ea typeface="Calibri" pitchFamily="34" charset="-122"/>
-                <a:cs typeface="Calibri" pitchFamily="34" charset="-120"/>
-              </a:rPr>
-              <a:t>Pocs minuts per aturar equips, o hores per a un servidor crític.</a:t>
-            </a:r>
-            <a:endParaRPr lang="en-US" sz="1100" dirty="0"/>
-          </a:p>
-        </p:txBody>
-      </p:sp>
-      <p:sp>
-        <p:nvSpPr>
-          <p:cNvPr id="14" name="Shape 10"/>
-          <p:cNvSpPr/>
-          <p:nvPr/>
-        </p:nvSpPr>
-        <p:spPr>
-          <a:xfrm>
-            <a:off x="7955280" y="1920240"/>
-            <a:ext cx="3383280" cy="2286000"/>
-          </a:xfrm>
-          <a:prstGeom prst="roundRect">
-            <a:avLst>
-              <a:gd name="adj" fmla="val 4800"/>
-            </a:avLst>
-          </a:prstGeom>
-          <a:solidFill>
-            <a:srgbClr val="FFFFFF"/>
-          </a:solidFill>
-          <a:ln/>
-          <a:effectLst>
-            <a:outerShdw sx="100000" sy="100000" kx="0" ky="0" algn="bl" rotWithShape="0" blurRad="76200" dist="25400" dir="5400000">
-              <a:srgbClr val="1B2A38">
-                <a:alpha val="12000"/>
-              </a:srgbClr>
-            </a:outerShdw>
-          </a:effectLst>
-        </p:spPr>
-      </p:sp>
-      <p:sp>
-        <p:nvSpPr>
-          <p:cNvPr id="15" name="Shape 11"/>
-          <p:cNvSpPr/>
-          <p:nvPr/>
-        </p:nvSpPr>
-        <p:spPr>
-          <a:xfrm>
-            <a:off x="9235440" y="2148840"/>
-            <a:ext cx="822960" cy="822960"/>
-          </a:xfrm>
-          <a:prstGeom prst="ellipse">
-            <a:avLst/>
-          </a:prstGeom>
-          <a:solidFill>
-            <a:srgbClr val="3E6680"/>
-          </a:solidFill>
-          <a:ln/>
-        </p:spPr>
-      </p:sp>
-      <p:pic>
-        <p:nvPicPr>
-          <p:cNvPr id="16" name="Image 2" descr="/home/claude/pptx_build/icons/map.png">    </p:cNvPr>
-          <p:cNvPicPr>
-            <a:picLocks noChangeAspect="1"/>
-          </p:cNvPicPr>
-          <p:nvPr/>
-        </p:nvPicPr>
-        <p:blipFill>
-          <a:blip r:embed="rId3"/>
-          <a:stretch>
-            <a:fillRect/>
-          </a:stretch>
-        </p:blipFill>
-        <p:spPr>
-          <a:xfrm>
-            <a:off x="9441180" y="2354580"/>
-            <a:ext cx="411480" cy="411480"/>
-          </a:xfrm>
-          <a:prstGeom prst="rect">
-            <a:avLst/>
-          </a:prstGeom>
-        </p:spPr>
-      </p:pic>
-      <p:sp>
-        <p:nvSpPr>
-          <p:cNvPr id="17" name="Text 12"/>
-          <p:cNvSpPr txBox="1"/>
-          <p:nvPr/>
-        </p:nvSpPr>
-        <p:spPr>
-          <a:xfrm>
-            <a:off x="8138160" y="3063240"/>
-            <a:ext cx="3017520" cy="548640"/>
-          </a:xfrm>
-          <a:prstGeom prst="rect">
-            <a:avLst/>
-          </a:prstGeom>
-          <a:noFill/>
-          <a:ln/>
-        </p:spPr>
-        <p:txBody>
-          <a:bodyPr wrap="square" lIns="0" tIns="0" rIns="0" bIns="0" rtlCol="0" anchor="ctr"/>
-          <a:lstStyle/>
-          <a:p>
-            <a:pPr algn="ctr" indent="0" marL="0">
-              <a:buNone/>
-            </a:pPr>
-            <a:r>
-              <a:rPr lang="en-US" sz="1300" b="1" dirty="0">
-                <a:solidFill>
-                  <a:srgbClr val="16242E"/>
-                </a:solidFill>
-                <a:latin typeface="Cambria" pitchFamily="34" charset="0"/>
-                <a:ea typeface="Cambria" pitchFamily="34" charset="-122"/>
-                <a:cs typeface="Cambria" pitchFamily="34" charset="-120"/>
-              </a:rPr>
-              <a:t>De quin espai disposes?</a:t>
-            </a:r>
-            <a:endParaRPr lang="en-US" sz="1300" dirty="0"/>
-          </a:p>
-        </p:txBody>
-      </p:sp>
-      <p:sp>
-        <p:nvSpPr>
-          <p:cNvPr id="18" name="Text 13"/>
-          <p:cNvSpPr txBox="1"/>
-          <p:nvPr/>
-        </p:nvSpPr>
-        <p:spPr>
-          <a:xfrm>
-            <a:off x="8183880" y="3611880"/>
-            <a:ext cx="2926080" cy="548640"/>
-          </a:xfrm>
-          <a:prstGeom prst="rect">
-            <a:avLst/>
-          </a:prstGeom>
-          <a:noFill/>
-          <a:ln/>
-        </p:spPr>
-        <p:txBody>
-          <a:bodyPr wrap="square" lIns="0" tIns="0" rIns="0" bIns="0" rtlCol="0" anchor="ctr"/>
-          <a:lstStyle/>
-          <a:p>
-            <a:pPr algn="ctr" indent="0" marL="0">
-              <a:buNone/>
-            </a:pPr>
-            <a:r>
-              <a:rPr lang="en-US" sz="1100" dirty="0">
-                <a:solidFill>
-                  <a:srgbClr val="5B6B77"/>
-                </a:solidFill>
-                <a:latin typeface="Calibri" pitchFamily="34" charset="0"/>
-                <a:ea typeface="Calibri" pitchFamily="34" charset="-122"/>
-                <a:cs typeface="Calibri" pitchFamily="34" charset="-120"/>
-              </a:rPr>
-              <a:t>Cal lloc a prop dels equips i bona ventilació.</a:t>
-            </a:r>
-            <a:endParaRPr lang="en-US" sz="1100" dirty="0"/>
-          </a:p>
-        </p:txBody>
-      </p:sp>
-      <p:sp>
-        <p:nvSpPr>
-          <p:cNvPr id="19" name="Shape 14"/>
-          <p:cNvSpPr/>
-          <p:nvPr/>
-        </p:nvSpPr>
-        <p:spPr>
-          <a:xfrm>
-            <a:off x="548640" y="4526280"/>
-            <a:ext cx="10607040" cy="1371600"/>
-          </a:xfrm>
-          <a:prstGeom prst="roundRect">
-            <a:avLst>
-              <a:gd name="adj" fmla="val 8000"/>
-            </a:avLst>
-          </a:prstGeom>
-          <a:solidFill>
-            <a:srgbClr val="13293D"/>
-          </a:solidFill>
-          <a:ln/>
-        </p:spPr>
-      </p:sp>
-      <p:sp>
-        <p:nvSpPr>
-          <p:cNvPr id="20" name="Shape 15"/>
-          <p:cNvSpPr/>
-          <p:nvPr/>
-        </p:nvSpPr>
-        <p:spPr>
-          <a:xfrm>
-            <a:off x="1005840" y="4754880"/>
-            <a:ext cx="914400" cy="914400"/>
-          </a:xfrm>
-          <a:prstGeom prst="ellipse">
-            <a:avLst/>
-          </a:prstGeom>
-          <a:solidFill>
-            <a:srgbClr val="F2A541"/>
-          </a:solidFill>
-          <a:ln/>
-        </p:spPr>
-      </p:sp>
-      <p:pic>
-        <p:nvPicPr>
-          <p:cNvPr id="21" name="Image 3" descr="/home/claude/pptx_build/icons/thermometer.png">    </p:cNvPr>
-          <p:cNvPicPr>
-            <a:picLocks noChangeAspect="1"/>
-          </p:cNvPicPr>
-          <p:nvPr/>
-        </p:nvPicPr>
-        <p:blipFill>
-          <a:blip r:embed="rId4"/>
-          <a:stretch>
-            <a:fillRect/>
-          </a:stretch>
-        </p:blipFill>
-        <p:spPr>
-          <a:xfrm>
-            <a:off x="1234440" y="4983480"/>
-            <a:ext cx="457200" cy="457200"/>
-          </a:xfrm>
-          <a:prstGeom prst="rect">
-            <a:avLst/>
-          </a:prstGeom>
-        </p:spPr>
-      </p:pic>
-      <p:sp>
-        <p:nvSpPr>
-          <p:cNvPr id="22" name="Text 16"/>
-          <p:cNvSpPr txBox="1"/>
-          <p:nvPr/>
-        </p:nvSpPr>
-        <p:spPr>
-          <a:xfrm>
-            <a:off x="2194560" y="4663440"/>
-            <a:ext cx="8595360" cy="1097280"/>
-          </a:xfrm>
-          <a:prstGeom prst="rect">
-            <a:avLst/>
-          </a:prstGeom>
-          <a:noFill/>
-          <a:ln/>
-        </p:spPr>
-        <p:txBody>
-          <a:bodyPr wrap="square" lIns="0" tIns="0" rIns="0" bIns="0" rtlCol="0" anchor="ctr"/>
-          <a:lstStyle/>
-          <a:p>
-            <a:pPr indent="0" marL="0">
-              <a:buNone/>
-            </a:pPr>
-            <a:r>
-              <a:rPr lang="en-US" sz="1350" dirty="0">
-                <a:solidFill>
-                  <a:srgbClr val="E4ECF1"/>
-                </a:solidFill>
-                <a:latin typeface="Calibri" pitchFamily="34" charset="0"/>
-                <a:ea typeface="Calibri" pitchFamily="34" charset="-122"/>
-                <a:cs typeface="Calibri" pitchFamily="34" charset="-120"/>
-              </a:rPr>
-              <a:t>Alguns SAI generen molta calor. Si la sala no està ben climatitzada, poden malmetre el propi maquinari que haurien de protegir. I recorda: cables sempre ben recollits, mai enmig del pas.</a:t>
-            </a:r>
-            <a:endParaRPr lang="en-US" sz="1350" dirty="0"/>
-          </a:p>
-        </p:txBody>
-      </p:sp>
-      <p:sp>
-        <p:nvSpPr>
-          <p:cNvPr id="23" name="Text 17"/>
-          <p:cNvSpPr txBox="1"/>
-          <p:nvPr/>
-        </p:nvSpPr>
-        <p:spPr>
-          <a:xfrm>
-            <a:off x="11548872" y="6446520"/>
-            <a:ext cx="365760" cy="274320"/>
-          </a:xfrm>
-          <a:prstGeom prst="rect">
-            <a:avLst/>
-          </a:prstGeom>
-          <a:noFill/>
-          <a:ln/>
-        </p:spPr>
-        <p:txBody>
-          <a:bodyPr wrap="square" lIns="0" tIns="0" rIns="0" bIns="0" rtlCol="0" anchor="ctr"/>
-          <a:lstStyle/>
-          <a:p>
-            <a:pPr algn="r" indent="0" marL="0">
-              <a:buNone/>
-            </a:pPr>
-            <a:r>
-              <a:rPr lang="en-US" sz="1000" dirty="0">
-                <a:solidFill>
-                  <a:srgbClr val="5B6B77"/>
-                </a:solidFill>
-                <a:latin typeface="Calibri" pitchFamily="34" charset="0"/>
-                <a:ea typeface="Calibri" pitchFamily="34" charset="-122"/>
-                <a:cs typeface="Calibri" pitchFamily="34" charset="-120"/>
-              </a:rPr>
-              <a:t>17</a:t>
-            </a:r>
-            <a:endParaRPr lang="en-US" sz="1000" dirty="0"/>
-          </a:p>
-        </p:txBody>
-      </p:sp>
-    </p:spTree>
-  </p:cSld>
-  <p:clrMapOvr>
-    <a:masterClrMapping/>
-  </p:clrMapOvr>
-</p:sld>
-</file>
-
-<file path=ppt/slides/slide18.xml><?xml version="1.0" encoding="utf-8"?>
-<p:sld xmlns:a="http://schemas.openxmlformats.org/drawingml/2006/main" xmlns:r="http://schemas.openxmlformats.org/officeDocument/2006/relationships" xmlns:p="http://schemas.openxmlformats.org/presentationml/2006/main">
-  <p:cSld name="Slide 18">
-    <p:bg>
-      <p:bgPr>
-        <a:solidFill>
-          <a:srgbClr val="13293D"/>
-        </a:solidFill>
-      </p:bgPr>
-    </p:bg>
-    <p:spTree>
-      <p:nvGrpSpPr>
-        <p:cNvPr id="1" name=""/>
-        <p:cNvGrpSpPr/>
-        <p:nvPr/>
-      </p:nvGrpSpPr>
-      <p:grpSpPr>
-        <a:xfrm>
-          <a:off x="0" y="0"/>
-          <a:ext cx="0" cy="0"/>
-          <a:chOff x="0" y="0"/>
-          <a:chExt cx="0" cy="0"/>
-        </a:xfrm>
-      </p:grpSpPr>
-      <p:sp>
-        <p:nvSpPr>
-          <p:cNvPr id="2" name="Text 0"/>
-          <p:cNvSpPr txBox="1"/>
-          <p:nvPr/>
-        </p:nvSpPr>
-        <p:spPr>
-          <a:xfrm>
-            <a:off x="548640" y="411480"/>
-            <a:ext cx="7315200" cy="320040"/>
-          </a:xfrm>
-          <a:prstGeom prst="rect">
-            <a:avLst/>
-          </a:prstGeom>
-          <a:noFill/>
-          <a:ln/>
-        </p:spPr>
-        <p:txBody>
-          <a:bodyPr wrap="square" lIns="0" tIns="0" rIns="0" bIns="0" rtlCol="0" anchor="ctr"/>
-          <a:lstStyle/>
-          <a:p>
-            <a:pPr indent="0" marL="0">
-              <a:buNone/>
-            </a:pPr>
-            <a:r>
-              <a:rPr lang="en-US" sz="1300" b="1" spc="200" kern="0" dirty="0">
-                <a:solidFill>
-                  <a:srgbClr val="F2A541"/>
-                </a:solidFill>
-                <a:latin typeface="Calibri" pitchFamily="34" charset="0"/>
-                <a:ea typeface="Calibri" pitchFamily="34" charset="-122"/>
-                <a:cs typeface="Calibri" pitchFamily="34" charset="-120"/>
-              </a:rPr>
-              <a:t>PER ACABAR</a:t>
-            </a:r>
-            <a:endParaRPr lang="en-US" sz="1300" dirty="0"/>
-          </a:p>
-        </p:txBody>
-      </p:sp>
-      <p:sp>
-        <p:nvSpPr>
-          <p:cNvPr id="3" name="Text 1"/>
-          <p:cNvSpPr txBox="1"/>
-          <p:nvPr/>
-        </p:nvSpPr>
-        <p:spPr>
-          <a:xfrm>
-            <a:off x="548640" y="685800"/>
-            <a:ext cx="9144000" cy="822960"/>
-          </a:xfrm>
-          <a:prstGeom prst="rect">
-            <a:avLst/>
-          </a:prstGeom>
-          <a:noFill/>
-          <a:ln/>
-        </p:spPr>
-        <p:txBody>
-          <a:bodyPr wrap="square" lIns="0" tIns="0" rIns="0" bIns="0" rtlCol="0" anchor="ctr"/>
-          <a:lstStyle/>
-          <a:p>
-            <a:pPr indent="0" marL="0">
-              <a:buNone/>
-            </a:pPr>
-            <a:r>
-              <a:rPr lang="en-US" sz="3200" b="1" dirty="0">
-                <a:solidFill>
-                  <a:srgbClr val="FFFFFF"/>
-                </a:solidFill>
-                <a:latin typeface="Cambria" pitchFamily="34" charset="0"/>
-                <a:ea typeface="Cambria" pitchFamily="34" charset="-122"/>
-                <a:cs typeface="Cambria" pitchFamily="34" charset="-120"/>
-              </a:rPr>
-              <a:t>Idees clau d'avui</a:t>
-            </a:r>
-            <a:endParaRPr lang="en-US" sz="3200" dirty="0"/>
-          </a:p>
-        </p:txBody>
-      </p:sp>
-      <p:sp>
-        <p:nvSpPr>
-          <p:cNvPr id="4" name="Shape 2"/>
-          <p:cNvSpPr/>
-          <p:nvPr/>
-        </p:nvSpPr>
-        <p:spPr>
-          <a:xfrm>
-            <a:off x="594360" y="2011680"/>
-            <a:ext cx="914400" cy="914400"/>
-          </a:xfrm>
-          <a:prstGeom prst="ellipse">
-            <a:avLst/>
-          </a:prstGeom>
-          <a:solidFill>
-            <a:srgbClr val="F2A541"/>
-          </a:solidFill>
-          <a:ln/>
-        </p:spPr>
-      </p:sp>
-      <p:pic>
-        <p:nvPicPr>
-          <p:cNvPr id="5" name="Image 0" descr="/home/claude/pptx_build/icons/warning.png">    </p:cNvPr>
-          <p:cNvPicPr>
-            <a:picLocks noChangeAspect="1"/>
-          </p:cNvPicPr>
-          <p:nvPr/>
-        </p:nvPicPr>
-        <p:blipFill>
-          <a:blip r:embed="rId1"/>
-          <a:stretch>
-            <a:fillRect/>
-          </a:stretch>
-        </p:blipFill>
-        <p:spPr>
-          <a:xfrm>
-            <a:off x="822960" y="2240280"/>
-            <a:ext cx="457200" cy="457200"/>
-          </a:xfrm>
-          <a:prstGeom prst="rect">
-            <a:avLst/>
-          </a:prstGeom>
-        </p:spPr>
-      </p:pic>
-      <p:sp>
-        <p:nvSpPr>
-          <p:cNvPr id="6" name="Text 3"/>
-          <p:cNvSpPr txBox="1"/>
-          <p:nvPr/>
-        </p:nvSpPr>
-        <p:spPr>
-          <a:xfrm>
-            <a:off x="1691640" y="1965960"/>
-            <a:ext cx="3840480" cy="1005840"/>
-          </a:xfrm>
-          <a:prstGeom prst="rect">
-            <a:avLst/>
-          </a:prstGeom>
-          <a:noFill/>
-          <a:ln/>
-        </p:spPr>
-        <p:txBody>
-          <a:bodyPr wrap="square" lIns="0" tIns="0" rIns="0" bIns="0" rtlCol="0" anchor="ctr"/>
-          <a:lstStyle/>
-          <a:p>
-            <a:pPr indent="0" marL="0">
-              <a:buNone/>
-            </a:pPr>
-            <a:r>
-              <a:rPr lang="en-US" sz="1350" dirty="0">
-                <a:solidFill>
-                  <a:srgbClr val="FFFFFF"/>
-                </a:solidFill>
-                <a:latin typeface="Calibri" pitchFamily="34" charset="0"/>
-                <a:ea typeface="Calibri" pitchFamily="34" charset="-122"/>
-                <a:cs typeface="Calibri" pitchFamily="34" charset="-120"/>
-              </a:rPr>
-              <a:t>4 problemes elèctrics: apagades, sobretensions, baixades de tensió i variació de freqüència.</a:t>
-            </a:r>
-            <a:endParaRPr lang="en-US" sz="1350" dirty="0"/>
-          </a:p>
-        </p:txBody>
-      </p:sp>
-      <p:sp>
-        <p:nvSpPr>
-          <p:cNvPr id="7" name="Shape 4"/>
-          <p:cNvSpPr/>
-          <p:nvPr/>
-        </p:nvSpPr>
-        <p:spPr>
-          <a:xfrm>
-            <a:off x="6172200" y="2011680"/>
-            <a:ext cx="914400" cy="914400"/>
-          </a:xfrm>
-          <a:prstGeom prst="ellipse">
-            <a:avLst/>
-          </a:prstGeom>
-          <a:solidFill>
-            <a:srgbClr val="3E6680"/>
-          </a:solidFill>
-          <a:ln/>
-        </p:spPr>
-      </p:sp>
-      <p:pic>
-        <p:nvPicPr>
-          <p:cNvPr id="8" name="Image 1" descr="/home/claude/pptx_build/icons/battery.png">    </p:cNvPr>
-          <p:cNvPicPr>
-            <a:picLocks noChangeAspect="1"/>
-          </p:cNvPicPr>
-          <p:nvPr/>
-        </p:nvPicPr>
-        <p:blipFill>
-          <a:blip r:embed="rId2"/>
-          <a:stretch>
-            <a:fillRect/>
-          </a:stretch>
-        </p:blipFill>
-        <p:spPr>
-          <a:xfrm>
-            <a:off x="6400800" y="2240280"/>
-            <a:ext cx="457200" cy="457200"/>
-          </a:xfrm>
-          <a:prstGeom prst="rect">
-            <a:avLst/>
-          </a:prstGeom>
-        </p:spPr>
-      </p:pic>
-      <p:sp>
-        <p:nvSpPr>
-          <p:cNvPr id="9" name="Text 5"/>
-          <p:cNvSpPr txBox="1"/>
-          <p:nvPr/>
-        </p:nvSpPr>
-        <p:spPr>
-          <a:xfrm>
-            <a:off x="7269480" y="1965960"/>
-            <a:ext cx="3840480" cy="1005840"/>
-          </a:xfrm>
-          <a:prstGeom prst="rect">
-            <a:avLst/>
-          </a:prstGeom>
-          <a:noFill/>
-          <a:ln/>
-        </p:spPr>
-        <p:txBody>
-          <a:bodyPr wrap="square" lIns="0" tIns="0" rIns="0" bIns="0" rtlCol="0" anchor="ctr"/>
-          <a:lstStyle/>
-          <a:p>
-            <a:pPr indent="0" marL="0">
-              <a:buNone/>
-            </a:pPr>
-            <a:r>
-              <a:rPr lang="en-US" sz="1350" dirty="0">
-                <a:solidFill>
-                  <a:srgbClr val="FFFFFF"/>
-                </a:solidFill>
-                <a:latin typeface="Calibri" pitchFamily="34" charset="0"/>
-                <a:ea typeface="Calibri" pitchFamily="34" charset="-122"/>
-                <a:cs typeface="Calibri" pitchFamily="34" charset="-120"/>
-              </a:rPr>
-              <a:t>Un SAI combina bateria + protecció elèctrica per als equips connectats.</a:t>
-            </a:r>
-            <a:endParaRPr lang="en-US" sz="1350" dirty="0"/>
-          </a:p>
-        </p:txBody>
-      </p:sp>
-      <p:sp>
-        <p:nvSpPr>
-          <p:cNvPr id="10" name="Shape 6"/>
-          <p:cNvSpPr/>
-          <p:nvPr/>
-        </p:nvSpPr>
-        <p:spPr>
-          <a:xfrm>
-            <a:off x="594360" y="4114800"/>
-            <a:ext cx="914400" cy="914400"/>
-          </a:xfrm>
-          <a:prstGeom prst="ellipse">
-            <a:avLst/>
-          </a:prstGeom>
-          <a:solidFill>
-            <a:srgbClr val="F2A541"/>
-          </a:solidFill>
-          <a:ln/>
-        </p:spPr>
-      </p:sp>
-      <p:pic>
-        <p:nvPicPr>
-          <p:cNvPr id="11" name="Image 2" descr="/home/claude/pptx_build/icons/exchange.png">    </p:cNvPr>
-          <p:cNvPicPr>
-            <a:picLocks noChangeAspect="1"/>
-          </p:cNvPicPr>
-          <p:nvPr/>
-        </p:nvPicPr>
-        <p:blipFill>
-          <a:blip r:embed="rId3"/>
-          <a:stretch>
-            <a:fillRect/>
-          </a:stretch>
-        </p:blipFill>
-        <p:spPr>
-          <a:xfrm>
-            <a:off x="822960" y="4343400"/>
-            <a:ext cx="457200" cy="457200"/>
-          </a:xfrm>
-          <a:prstGeom prst="rect">
-            <a:avLst/>
-          </a:prstGeom>
-        </p:spPr>
-      </p:pic>
-      <p:sp>
-        <p:nvSpPr>
-          <p:cNvPr id="12" name="Text 7"/>
-          <p:cNvSpPr txBox="1"/>
-          <p:nvPr/>
-        </p:nvSpPr>
-        <p:spPr>
-          <a:xfrm>
-            <a:off x="1691640" y="4069080"/>
-            <a:ext cx="3840480" cy="1005840"/>
-          </a:xfrm>
-          <a:prstGeom prst="rect">
-            <a:avLst/>
-          </a:prstGeom>
-          <a:noFill/>
-          <a:ln/>
-        </p:spPr>
-        <p:txBody>
-          <a:bodyPr wrap="square" lIns="0" tIns="0" rIns="0" bIns="0" rtlCol="0" anchor="ctr"/>
-          <a:lstStyle/>
-          <a:p>
-            <a:pPr indent="0" marL="0">
-              <a:buNone/>
-            </a:pPr>
-            <a:r>
-              <a:rPr lang="en-US" sz="1350" dirty="0">
-                <a:solidFill>
-                  <a:srgbClr val="FFFFFF"/>
-                </a:solidFill>
-                <a:latin typeface="Calibri" pitchFamily="34" charset="0"/>
-                <a:ea typeface="Calibri" pitchFamily="34" charset="-122"/>
-                <a:cs typeface="Calibri" pitchFamily="34" charset="-120"/>
-              </a:rPr>
-              <a:t>3 tipus de SAI: standby, interactiu de línia i online (sense temps de transferència).</a:t>
-            </a:r>
-            <a:endParaRPr lang="en-US" sz="1350" dirty="0"/>
-          </a:p>
-        </p:txBody>
-      </p:sp>
-      <p:sp>
-        <p:nvSpPr>
-          <p:cNvPr id="13" name="Shape 8"/>
-          <p:cNvSpPr/>
-          <p:nvPr/>
-        </p:nvSpPr>
-        <p:spPr>
-          <a:xfrm>
-            <a:off x="6172200" y="4114800"/>
-            <a:ext cx="914400" cy="914400"/>
-          </a:xfrm>
-          <a:prstGeom prst="ellipse">
-            <a:avLst/>
-          </a:prstGeom>
-          <a:solidFill>
-            <a:srgbClr val="3E6680"/>
-          </a:solidFill>
-          <a:ln/>
-        </p:spPr>
-      </p:sp>
-      <p:pic>
-        <p:nvPicPr>
-          <p:cNvPr id="14" name="Image 3" descr="/home/claude/pptx_build/icons/gauge.png">    </p:cNvPr>
-          <p:cNvPicPr>
-            <a:picLocks noChangeAspect="1"/>
-          </p:cNvPicPr>
-          <p:nvPr/>
-        </p:nvPicPr>
-        <p:blipFill>
-          <a:blip r:embed="rId4"/>
-          <a:stretch>
-            <a:fillRect/>
-          </a:stretch>
-        </p:blipFill>
-        <p:spPr>
-          <a:xfrm>
-            <a:off x="6400800" y="4343400"/>
-            <a:ext cx="457200" cy="457200"/>
-          </a:xfrm>
-          <a:prstGeom prst="rect">
-            <a:avLst/>
-          </a:prstGeom>
-        </p:spPr>
-      </p:pic>
-      <p:sp>
-        <p:nvSpPr>
-          <p:cNvPr id="15" name="Text 9"/>
-          <p:cNvSpPr txBox="1"/>
-          <p:nvPr/>
-        </p:nvSpPr>
-        <p:spPr>
-          <a:xfrm>
-            <a:off x="7269480" y="4069080"/>
-            <a:ext cx="3840480" cy="1005840"/>
-          </a:xfrm>
-          <a:prstGeom prst="rect">
-            <a:avLst/>
-          </a:prstGeom>
-          <a:noFill/>
-          <a:ln/>
-        </p:spPr>
-        <p:txBody>
-          <a:bodyPr wrap="square" lIns="0" tIns="0" rIns="0" bIns="0" rtlCol="0" anchor="ctr"/>
-          <a:lstStyle/>
-          <a:p>
-            <a:pPr indent="0" marL="0">
-              <a:buNone/>
-            </a:pPr>
-            <a:r>
-              <a:rPr lang="en-US" sz="1350" dirty="0">
-                <a:solidFill>
-                  <a:srgbClr val="FFFFFF"/>
-                </a:solidFill>
-                <a:latin typeface="Calibri" pitchFamily="34" charset="0"/>
-                <a:ea typeface="Calibri" pitchFamily="34" charset="-122"/>
-                <a:cs typeface="Calibri" pitchFamily="34" charset="-120"/>
-              </a:rPr>
-              <a:t>Escollir un SAI: calcula la càrrega en watts (W), mai en VA, i pensa l'autonomia que necessites.</a:t>
-            </a:r>
-            <a:endParaRPr lang="en-US" sz="1350" dirty="0"/>
-          </a:p>
-        </p:txBody>
-      </p:sp>
-      <p:sp>
-        <p:nvSpPr>
-          <p:cNvPr id="16" name="Text 10"/>
-          <p:cNvSpPr txBox="1"/>
-          <p:nvPr/>
-        </p:nvSpPr>
-        <p:spPr>
-          <a:xfrm>
-            <a:off x="11548872" y="6446520"/>
-            <a:ext cx="365760" cy="274320"/>
-          </a:xfrm>
-          <a:prstGeom prst="rect">
-            <a:avLst/>
-          </a:prstGeom>
-          <a:noFill/>
-          <a:ln/>
-        </p:spPr>
-        <p:txBody>
-          <a:bodyPr wrap="square" lIns="0" tIns="0" rIns="0" bIns="0" rtlCol="0" anchor="ctr"/>
-          <a:lstStyle/>
-          <a:p>
-            <a:pPr algn="r" indent="0" marL="0">
-              <a:buNone/>
-            </a:pPr>
-            <a:r>
-              <a:rPr lang="en-US" sz="1000" dirty="0">
-                <a:solidFill>
-                  <a:srgbClr val="5B6B77"/>
-                </a:solidFill>
-                <a:latin typeface="Calibri" pitchFamily="34" charset="0"/>
-                <a:ea typeface="Calibri" pitchFamily="34" charset="-122"/>
-                <a:cs typeface="Calibri" pitchFamily="34" charset="-120"/>
-              </a:rPr>
-              <a:t>18</a:t>
-            </a:r>
-            <a:endParaRPr lang="en-US" sz="1000" dirty="0"/>
-          </a:p>
-        </p:txBody>
-      </p:sp>
-    </p:spTree>
-  </p:cSld>
-  <p:clrMapOvr>
-    <a:masterClrMapping/>
-  </p:clrMapOvr>
-</p:sld>
-</file>
-
-<file path=ppt/slides/slide19.xml><?xml version="1.0" encoding="utf-8"?>
-<p:sld xmlns:a="http://schemas.openxmlformats.org/drawingml/2006/main" xmlns:r="http://schemas.openxmlformats.org/officeDocument/2006/relationships" xmlns:p="http://schemas.openxmlformats.org/presentationml/2006/main">
-  <p:cSld name="Slide 19">
-    <p:bg>
-      <p:bgPr>
-        <a:solidFill>
-          <a:srgbClr val="F2A541"/>
-        </a:solidFill>
-      </p:bgPr>
-    </p:bg>
-    <p:spTree>
-      <p:nvGrpSpPr>
-        <p:cNvPr id="1" name=""/>
-        <p:cNvGrpSpPr/>
-        <p:nvPr/>
-      </p:nvGrpSpPr>
-      <p:grpSpPr>
-        <a:xfrm>
-          <a:off x="0" y="0"/>
-          <a:ext cx="0" cy="0"/>
-          <a:chOff x="0" y="0"/>
-          <a:chExt cx="0" cy="0"/>
-        </a:xfrm>
-      </p:grpSpPr>
-      <p:sp>
-        <p:nvSpPr>
-          <p:cNvPr id="2" name="Shape 0"/>
-          <p:cNvSpPr/>
-          <p:nvPr/>
-        </p:nvSpPr>
-        <p:spPr>
-          <a:xfrm>
-            <a:off x="8686800" y="-1828800"/>
-            <a:ext cx="5486400" cy="5486400"/>
-          </a:xfrm>
-          <a:prstGeom prst="ellipse">
-            <a:avLst/>
-          </a:prstGeom>
-          <a:solidFill>
-            <a:srgbClr val="FFFFFF">
-              <a:alpha val="20000"/>
-            </a:srgbClr>
-          </a:solidFill>
-          <a:ln/>
-        </p:spPr>
-      </p:sp>
-      <p:sp>
-        <p:nvSpPr>
-          <p:cNvPr id="3" name="Shape 1"/>
-          <p:cNvSpPr/>
-          <p:nvPr/>
-        </p:nvSpPr>
-        <p:spPr>
-          <a:xfrm>
-            <a:off x="1051560" y="2651760"/>
-            <a:ext cx="1554480" cy="1554480"/>
-          </a:xfrm>
-          <a:prstGeom prst="ellipse">
-            <a:avLst/>
-          </a:prstGeom>
-          <a:solidFill>
-            <a:srgbClr val="13293D"/>
-          </a:solidFill>
-          <a:ln/>
-        </p:spPr>
-      </p:sp>
-      <p:pic>
-        <p:nvPicPr>
-          <p:cNvPr id="4" name="Image 0" descr="/home/claude/pptx_build/icons/question.png">    </p:cNvPr>
-          <p:cNvPicPr>
-            <a:picLocks noChangeAspect="1"/>
-          </p:cNvPicPr>
-          <p:nvPr/>
-        </p:nvPicPr>
-        <p:blipFill>
-          <a:blip r:embed="rId1"/>
-          <a:stretch>
-            <a:fillRect/>
-          </a:stretch>
-        </p:blipFill>
-        <p:spPr>
-          <a:xfrm>
-            <a:off x="1401318" y="3001518"/>
-            <a:ext cx="854964" cy="854964"/>
-          </a:xfrm>
-          <a:prstGeom prst="rect">
-            <a:avLst/>
-          </a:prstGeom>
-        </p:spPr>
-      </p:pic>
-      <p:sp>
-        <p:nvSpPr>
-          <p:cNvPr id="5" name="Text 2"/>
-          <p:cNvSpPr txBox="1"/>
-          <p:nvPr/>
-        </p:nvSpPr>
-        <p:spPr>
-          <a:xfrm>
-            <a:off x="3291840" y="1828800"/>
-            <a:ext cx="8229600" cy="365760"/>
-          </a:xfrm>
-          <a:prstGeom prst="rect">
-            <a:avLst/>
-          </a:prstGeom>
-          <a:noFill/>
-          <a:ln/>
-        </p:spPr>
-        <p:txBody>
-          <a:bodyPr wrap="square" lIns="0" tIns="0" rIns="0" bIns="0" rtlCol="0" anchor="ctr"/>
-          <a:lstStyle/>
-          <a:p>
-            <a:pPr indent="0" marL="0">
-              <a:buNone/>
-            </a:pPr>
-            <a:r>
-              <a:rPr lang="en-US" sz="1400" b="1" spc="200" kern="0" dirty="0">
-                <a:solidFill>
-                  <a:srgbClr val="0B1B29"/>
-                </a:solidFill>
-                <a:latin typeface="Calibri" pitchFamily="34" charset="0"/>
-                <a:ea typeface="Calibri" pitchFamily="34" charset="-122"/>
-                <a:cs typeface="Calibri" pitchFamily="34" charset="-120"/>
-              </a:rPr>
-              <a:t>ARA ÉS EL TORN VOSTRE</a:t>
-            </a:r>
-            <a:endParaRPr lang="en-US" sz="1400" dirty="0"/>
-          </a:p>
-        </p:txBody>
-      </p:sp>
-      <p:sp>
-        <p:nvSpPr>
-          <p:cNvPr id="6" name="Text 3"/>
-          <p:cNvSpPr txBox="1"/>
-          <p:nvPr/>
-        </p:nvSpPr>
-        <p:spPr>
-          <a:xfrm>
-            <a:off x="3246120" y="2240280"/>
-            <a:ext cx="8503920" cy="1371600"/>
-          </a:xfrm>
-          <a:prstGeom prst="rect">
-            <a:avLst/>
-          </a:prstGeom>
-          <a:noFill/>
-          <a:ln/>
-        </p:spPr>
-        <p:txBody>
-          <a:bodyPr wrap="square" lIns="0" tIns="0" rIns="0" bIns="0" rtlCol="0" anchor="ctr"/>
-          <a:lstStyle/>
-          <a:p>
-            <a:pPr indent="0" marL="0">
-              <a:buNone/>
-            </a:pPr>
-            <a:r>
-              <a:rPr lang="en-US" sz="2500" b="1" dirty="0">
-                <a:solidFill>
-                  <a:srgbClr val="0B1B29"/>
-                </a:solidFill>
-                <a:latin typeface="Cambria" pitchFamily="34" charset="0"/>
-                <a:ea typeface="Cambria" pitchFamily="34" charset="-122"/>
-                <a:cs typeface="Cambria" pitchFamily="34" charset="-120"/>
-              </a:rPr>
-              <a:t>Heu d'escollir un SAI per a un petit despatx amb 3 ordinadors i 1 servidor.</a:t>
-            </a:r>
-            <a:endParaRPr lang="en-US" sz="2500" dirty="0"/>
-          </a:p>
-        </p:txBody>
-      </p:sp>
-      <p:sp>
-        <p:nvSpPr>
-          <p:cNvPr id="7" name="Text 4"/>
-          <p:cNvSpPr txBox="1"/>
-          <p:nvPr/>
-        </p:nvSpPr>
-        <p:spPr>
-          <a:xfrm>
-            <a:off x="3291840" y="3657600"/>
-            <a:ext cx="8229600" cy="1188720"/>
-          </a:xfrm>
-          <a:prstGeom prst="rect">
-            <a:avLst/>
-          </a:prstGeom>
-          <a:noFill/>
-          <a:ln/>
-        </p:spPr>
-        <p:txBody>
-          <a:bodyPr wrap="square" lIns="0" tIns="0" rIns="0" bIns="0" rtlCol="0" anchor="ctr"/>
-          <a:lstStyle/>
-          <a:p>
-            <a:pPr indent="0" marL="0">
-              <a:buNone/>
-            </a:pPr>
-            <a:r>
-              <a:rPr lang="en-US" sz="1550" dirty="0">
-                <a:solidFill>
-                  <a:srgbClr val="0B1B29"/>
-                </a:solidFill>
-                <a:latin typeface="Calibri" pitchFamily="34" charset="0"/>
-                <a:ea typeface="Calibri" pitchFamily="34" charset="-122"/>
-                <a:cs typeface="Calibri" pitchFamily="34" charset="-120"/>
-              </a:rPr>
-              <a:t>En grups de 3: decidiu quin tipus de SAI (standby, interactiu o online) triaríeu, quina autonomia demanaríeu i com calcularíeu la càrrega necessària (en W).</a:t>
-            </a:r>
-            <a:endParaRPr lang="en-US" sz="1550" dirty="0"/>
-          </a:p>
-        </p:txBody>
-      </p:sp>
-      <p:sp>
-        <p:nvSpPr>
-          <p:cNvPr id="8" name="Shape 5"/>
-          <p:cNvSpPr/>
-          <p:nvPr/>
-        </p:nvSpPr>
-        <p:spPr>
-          <a:xfrm>
-            <a:off x="3291840" y="4937760"/>
-            <a:ext cx="8138160" cy="1051560"/>
-          </a:xfrm>
-          <a:prstGeom prst="roundRect">
-            <a:avLst>
-              <a:gd name="adj" fmla="val 8696"/>
-            </a:avLst>
-          </a:prstGeom>
-          <a:solidFill>
-            <a:srgbClr val="13293D"/>
-          </a:solidFill>
-          <a:ln/>
-        </p:spPr>
-      </p:sp>
-      <p:sp>
-        <p:nvSpPr>
-          <p:cNvPr id="9" name="Text 6"/>
-          <p:cNvSpPr txBox="1"/>
-          <p:nvPr/>
-        </p:nvSpPr>
-        <p:spPr>
-          <a:xfrm>
-            <a:off x="3566160" y="4937760"/>
-            <a:ext cx="7680960" cy="1051560"/>
-          </a:xfrm>
-          <a:prstGeom prst="rect">
-            <a:avLst/>
-          </a:prstGeom>
-          <a:noFill/>
-          <a:ln/>
-        </p:spPr>
-        <p:txBody>
-          <a:bodyPr wrap="square" lIns="0" tIns="0" rIns="0" bIns="0" rtlCol="0" anchor="ctr"/>
-          <a:lstStyle/>
-          <a:p>
-            <a:pPr indent="0" marL="0">
-              <a:buNone/>
-            </a:pPr>
-            <a:r>
-              <a:rPr lang="en-US" sz="1500" b="1" dirty="0">
-                <a:solidFill>
-                  <a:srgbClr val="FFFFFF"/>
-                </a:solidFill>
-                <a:latin typeface="Calibri" pitchFamily="34" charset="0"/>
-                <a:ea typeface="Calibri" pitchFamily="34" charset="-122"/>
-                <a:cs typeface="Calibri" pitchFamily="34" charset="-120"/>
-              </a:rPr>
-              <a:t>10 minuts en grup + posada en comú</a:t>
-            </a:r>
-            <a:endParaRPr lang="en-US" sz="1500" dirty="0"/>
           </a:p>
         </p:txBody>
       </p:sp>
@@ -10082,6 +9455,10 @@
             </a:outerShdw>
           </a:effectLst>
         </p:spPr>
+        <p:txBody>
+          <a:bodyPr/>
+          <a:p/>
+        </p:txBody>
       </p:sp>
       <p:sp>
         <p:nvSpPr>
@@ -10102,6 +9479,10 @@
           </a:solidFill>
           <a:ln/>
         </p:spPr>
+        <p:txBody>
+          <a:bodyPr/>
+          <a:p/>
+        </p:txBody>
       </p:sp>
       <p:pic>
         <p:nvPicPr>
@@ -10233,6 +9614,10 @@
             </a:outerShdw>
           </a:effectLst>
         </p:spPr>
+        <p:txBody>
+          <a:bodyPr/>
+          <a:p/>
+        </p:txBody>
       </p:sp>
       <p:sp>
         <p:nvSpPr>
@@ -10253,6 +9638,10 @@
           </a:solidFill>
           <a:ln/>
         </p:spPr>
+        <p:txBody>
+          <a:bodyPr/>
+          <a:p/>
+        </p:txBody>
       </p:sp>
       <p:pic>
         <p:nvPicPr>
@@ -10384,6 +9773,10 @@
             </a:outerShdw>
           </a:effectLst>
         </p:spPr>
+        <p:txBody>
+          <a:bodyPr/>
+          <a:p/>
+        </p:txBody>
       </p:sp>
       <p:sp>
         <p:nvSpPr>
@@ -10404,6 +9797,10 @@
           </a:solidFill>
           <a:ln/>
         </p:spPr>
+        <p:txBody>
+          <a:bodyPr/>
+          <a:p/>
+        </p:txBody>
       </p:sp>
       <p:pic>
         <p:nvPicPr>
@@ -10555,6 +9952,1719 @@
 </file>
 
 <file path=ppt/slides/slide20.xml><?xml version="1.0" encoding="utf-8"?>
+<p:sld xmlns:a="http://schemas.openxmlformats.org/drawingml/2006/main" xmlns:p="http://schemas.openxmlformats.org/presentationml/2006/main" xmlns:r="http://schemas.openxmlformats.org/officeDocument/2006/relationships">
+  <p:cSld>
+    <p:bg>
+      <p:bgPr>
+        <a:solidFill>
+          <a:srgbClr val="F4F7F9"/>
+        </a:solidFill>
+        <a:effectLst/>
+      </p:bgPr>
+    </p:bg>
+    <p:spTree>
+      <p:nvGrpSpPr>
+        <p:cNvPr id="1" name=""/>
+        <p:cNvGrpSpPr/>
+        <p:nvPr/>
+      </p:nvGrpSpPr>
+      <p:grpSpPr/>
+      <p:sp>
+        <p:nvSpPr>
+          <p:cNvPr id="2" name="TextBox 1"/>
+          <p:cNvSpPr txBox="1"/>
+          <p:nvPr/>
+        </p:nvSpPr>
+        <p:spPr>
+          <a:xfrm>
+            <a:off x="548640" y="411480"/>
+            <a:ext cx="10515600" cy="320040"/>
+          </a:xfrm>
+          <a:prstGeom prst="rect">
+            <a:avLst/>
+          </a:prstGeom>
+          <a:noFill/>
+        </p:spPr>
+        <p:txBody>
+          <a:bodyPr wrap="square">
+            <a:spAutoFit/>
+          </a:bodyPr>
+          <a:lstStyle/>
+          <a:p>
+            <a:pPr algn="l"/>
+            <a:r>
+              <a:rPr sz="1300" b="1" i="0">
+                <a:solidFill>
+                  <a:srgbClr val="F2A541"/>
+                </a:solidFill>
+                <a:latin typeface="Calibri"/>
+              </a:rPr>
+              <a:t>SOTA EL CAPÓ</a:t>
+            </a:r>
+          </a:p>
+        </p:txBody>
+      </p:sp>
+      <p:sp>
+        <p:nvSpPr>
+          <p:cNvPr id="3" name="TextBox 2"/>
+          <p:cNvSpPr txBox="1"/>
+          <p:nvPr/>
+        </p:nvSpPr>
+        <p:spPr>
+          <a:xfrm>
+            <a:off x="548640" y="685800"/>
+            <a:ext cx="10972800" cy="822960"/>
+          </a:xfrm>
+          <a:prstGeom prst="rect">
+            <a:avLst/>
+          </a:prstGeom>
+          <a:noFill/>
+        </p:spPr>
+        <p:txBody>
+          <a:bodyPr wrap="square">
+            <a:spAutoFit/>
+          </a:bodyPr>
+          <a:lstStyle/>
+          <a:p>
+            <a:pPr algn="l"/>
+            <a:r>
+              <a:rPr sz="2800" b="1" i="0">
+                <a:solidFill>
+                  <a:srgbClr val="16242E"/>
+                </a:solidFill>
+                <a:latin typeface="Cambria"/>
+              </a:rPr>
+              <a:t>Watts (W) ≠ Voltamperes (VA)</a:t>
+            </a:r>
+          </a:p>
+        </p:txBody>
+      </p:sp>
+      <p:pic>
+        <p:nvPicPr>
+          <p:cNvPr id="4" name="Picture 3" descr="w_vs_va.png"/>
+          <p:cNvPicPr>
+            <a:picLocks noChangeAspect="1"/>
+          </p:cNvPicPr>
+          <p:nvPr/>
+        </p:nvPicPr>
+        <p:blipFill>
+          <a:blip r:embed="rId2"/>
+          <a:stretch>
+            <a:fillRect/>
+          </a:stretch>
+        </p:blipFill>
+        <p:spPr>
+          <a:xfrm>
+            <a:off x="2895447" y="1920240"/>
+            <a:ext cx="6400800" cy="4200525"/>
+          </a:xfrm>
+          <a:prstGeom prst="rect">
+            <a:avLst/>
+          </a:prstGeom>
+        </p:spPr>
+      </p:pic>
+      <p:sp>
+        <p:nvSpPr>
+          <p:cNvPr id="5" name="TextBox 4"/>
+          <p:cNvSpPr txBox="1"/>
+          <p:nvPr/>
+        </p:nvSpPr>
+        <p:spPr>
+          <a:xfrm>
+            <a:off x="548640" y="6257925"/>
+            <a:ext cx="11064240" cy="457200"/>
+          </a:xfrm>
+          <a:prstGeom prst="rect">
+            <a:avLst/>
+          </a:prstGeom>
+          <a:noFill/>
+        </p:spPr>
+        <p:txBody>
+          <a:bodyPr wrap="square">
+            <a:spAutoFit/>
+          </a:bodyPr>
+          <a:lstStyle/>
+          <a:p>
+            <a:pPr algn="ctr"/>
+            <a:r>
+              <a:rPr sz="1200" b="0" i="1">
+                <a:solidFill>
+                  <a:srgbClr val="5B6B77"/>
+                </a:solidFill>
+                <a:latin typeface="Calibri"/>
+              </a:rPr>
+              <a:t>La potència real (W) s'obté multiplicant la potència aparent (VA) pel factor de potència (FP).</a:t>
+            </a:r>
+          </a:p>
+        </p:txBody>
+      </p:sp>
+      <p:sp>
+        <p:nvSpPr>
+          <p:cNvPr id="6" name="TextBox 5"/>
+          <p:cNvSpPr txBox="1"/>
+          <p:nvPr/>
+        </p:nvSpPr>
+        <p:spPr>
+          <a:xfrm>
+            <a:off x="11548872" y="6446520"/>
+            <a:ext cx="365760" cy="274320"/>
+          </a:xfrm>
+          <a:prstGeom prst="rect">
+            <a:avLst/>
+          </a:prstGeom>
+          <a:noFill/>
+        </p:spPr>
+        <p:txBody>
+          <a:bodyPr wrap="none">
+            <a:spAutoFit/>
+          </a:bodyPr>
+          <a:lstStyle/>
+          <a:p>
+            <a:pPr algn="r"/>
+            <a:r>
+              <a:rPr sz="1000">
+                <a:solidFill>
+                  <a:srgbClr val="5B6B77"/>
+                </a:solidFill>
+              </a:rPr>
+              <a:t>20</a:t>
+            </a:r>
+          </a:p>
+        </p:txBody>
+      </p:sp>
+    </p:spTree>
+  </p:cSld>
+  <p:clrMapOvr>
+    <a:masterClrMapping/>
+  </p:clrMapOvr>
+</p:sld>
+</file>
+
+<file path=ppt/slides/slide21.xml><?xml version="1.0" encoding="utf-8"?>
+<p:sld xmlns:a="http://schemas.openxmlformats.org/drawingml/2006/main" xmlns:r="http://schemas.openxmlformats.org/officeDocument/2006/relationships" xmlns:p="http://schemas.openxmlformats.org/presentationml/2006/main">
+  <p:cSld name="Slide 17">
+    <p:bg>
+      <p:bgPr>
+        <a:solidFill>
+          <a:srgbClr val="F4F7F9"/>
+        </a:solidFill>
+      </p:bgPr>
+    </p:bg>
+    <p:spTree>
+      <p:nvGrpSpPr>
+        <p:cNvPr id="1" name=""/>
+        <p:cNvGrpSpPr/>
+        <p:nvPr/>
+      </p:nvGrpSpPr>
+      <p:grpSpPr>
+        <a:xfrm>
+          <a:off x="0" y="0"/>
+          <a:ext cx="0" cy="0"/>
+          <a:chOff x="0" y="0"/>
+          <a:chExt cx="0" cy="0"/>
+        </a:xfrm>
+      </p:grpSpPr>
+      <p:sp>
+        <p:nvSpPr>
+          <p:cNvPr id="2" name="Text 0"/>
+          <p:cNvSpPr txBox="1"/>
+          <p:nvPr/>
+        </p:nvSpPr>
+        <p:spPr>
+          <a:xfrm>
+            <a:off x="548640" y="411480"/>
+            <a:ext cx="7315200" cy="320040"/>
+          </a:xfrm>
+          <a:prstGeom prst="rect">
+            <a:avLst/>
+          </a:prstGeom>
+          <a:noFill/>
+          <a:ln/>
+        </p:spPr>
+        <p:txBody>
+          <a:bodyPr wrap="square" lIns="0" tIns="0" rIns="0" bIns="0" rtlCol="0" anchor="ctr"/>
+          <a:lstStyle/>
+          <a:p>
+            <a:pPr indent="0" marL="0">
+              <a:buNone/>
+            </a:pPr>
+            <a:r>
+              <a:rPr lang="en-US" sz="1300" b="1" spc="200" kern="0" dirty="0">
+                <a:solidFill>
+                  <a:srgbClr val="F2A541"/>
+                </a:solidFill>
+                <a:latin typeface="Calibri" pitchFamily="34" charset="0"/>
+                <a:ea typeface="Calibri" pitchFamily="34" charset="-122"/>
+                <a:cs typeface="Calibri" pitchFamily="34" charset="-120"/>
+              </a:rPr>
+              <a:t>A L'HORA DE DECIDIR</a:t>
+            </a:r>
+            <a:endParaRPr lang="en-US" sz="1300" dirty="0"/>
+          </a:p>
+        </p:txBody>
+      </p:sp>
+      <p:sp>
+        <p:nvSpPr>
+          <p:cNvPr id="3" name="Text 1"/>
+          <p:cNvSpPr txBox="1"/>
+          <p:nvPr/>
+        </p:nvSpPr>
+        <p:spPr>
+          <a:xfrm>
+            <a:off x="548640" y="685800"/>
+            <a:ext cx="9144000" cy="822960"/>
+          </a:xfrm>
+          <a:prstGeom prst="rect">
+            <a:avLst/>
+          </a:prstGeom>
+          <a:noFill/>
+          <a:ln/>
+        </p:spPr>
+        <p:txBody>
+          <a:bodyPr wrap="square" lIns="0" tIns="0" rIns="0" bIns="0" rtlCol="0" anchor="ctr"/>
+          <a:lstStyle/>
+          <a:p>
+            <a:pPr indent="0" marL="0">
+              <a:buNone/>
+            </a:pPr>
+            <a:r>
+              <a:rPr lang="en-US" sz="3200" b="1" dirty="0">
+                <a:solidFill>
+                  <a:srgbClr val="16242E"/>
+                </a:solidFill>
+                <a:latin typeface="Cambria" pitchFamily="34" charset="0"/>
+                <a:ea typeface="Cambria" pitchFamily="34" charset="-122"/>
+                <a:cs typeface="Cambria" pitchFamily="34" charset="-120"/>
+              </a:rPr>
+              <a:t>Escollir i ubicar el SAI</a:t>
+            </a:r>
+            <a:endParaRPr lang="en-US" sz="3200" dirty="0"/>
+          </a:p>
+        </p:txBody>
+      </p:sp>
+      <p:sp>
+        <p:nvSpPr>
+          <p:cNvPr id="4" name="Shape 2"/>
+          <p:cNvSpPr/>
+          <p:nvPr/>
+        </p:nvSpPr>
+        <p:spPr>
+          <a:xfrm>
+            <a:off x="548640" y="1920240"/>
+            <a:ext cx="3383280" cy="2286000"/>
+          </a:xfrm>
+          <a:prstGeom prst="roundRect">
+            <a:avLst>
+              <a:gd name="adj" fmla="val 4800"/>
+            </a:avLst>
+          </a:prstGeom>
+          <a:solidFill>
+            <a:srgbClr val="FFFFFF"/>
+          </a:solidFill>
+          <a:ln/>
+          <a:effectLst>
+            <a:outerShdw sx="100000" sy="100000" kx="0" ky="0" algn="bl" rotWithShape="0" blurRad="76200" dist="25400" dir="5400000">
+              <a:srgbClr val="1B2A38">
+                <a:alpha val="12000"/>
+              </a:srgbClr>
+            </a:outerShdw>
+          </a:effectLst>
+        </p:spPr>
+        <p:txBody>
+          <a:bodyPr/>
+          <a:p/>
+        </p:txBody>
+      </p:sp>
+      <p:sp>
+        <p:nvSpPr>
+          <p:cNvPr id="5" name="Shape 3"/>
+          <p:cNvSpPr/>
+          <p:nvPr/>
+        </p:nvSpPr>
+        <p:spPr>
+          <a:xfrm>
+            <a:off x="1828800" y="2148840"/>
+            <a:ext cx="822960" cy="822960"/>
+          </a:xfrm>
+          <a:prstGeom prst="ellipse">
+            <a:avLst/>
+          </a:prstGeom>
+          <a:solidFill>
+            <a:srgbClr val="3E6680"/>
+          </a:solidFill>
+          <a:ln/>
+        </p:spPr>
+        <p:txBody>
+          <a:bodyPr/>
+          <a:p/>
+        </p:txBody>
+      </p:sp>
+      <p:pic>
+        <p:nvPicPr>
+          <p:cNvPr id="6" name="Image 0" descr="/home/claude/pptx_build/icons/weight.png">    </p:cNvPr>
+          <p:cNvPicPr>
+            <a:picLocks noChangeAspect="1"/>
+          </p:cNvPicPr>
+          <p:nvPr/>
+        </p:nvPicPr>
+        <p:blipFill>
+          <a:blip r:embed="rId1"/>
+          <a:stretch>
+            <a:fillRect/>
+          </a:stretch>
+        </p:blipFill>
+        <p:spPr>
+          <a:xfrm>
+            <a:off x="2034540" y="2354580"/>
+            <a:ext cx="411480" cy="411480"/>
+          </a:xfrm>
+          <a:prstGeom prst="rect">
+            <a:avLst/>
+          </a:prstGeom>
+        </p:spPr>
+      </p:pic>
+      <p:sp>
+        <p:nvSpPr>
+          <p:cNvPr id="7" name="Text 4"/>
+          <p:cNvSpPr txBox="1"/>
+          <p:nvPr/>
+        </p:nvSpPr>
+        <p:spPr>
+          <a:xfrm>
+            <a:off x="731520" y="3063240"/>
+            <a:ext cx="3017520" cy="548640"/>
+          </a:xfrm>
+          <a:prstGeom prst="rect">
+            <a:avLst/>
+          </a:prstGeom>
+          <a:noFill/>
+          <a:ln/>
+        </p:spPr>
+        <p:txBody>
+          <a:bodyPr wrap="square" lIns="0" tIns="0" rIns="0" bIns="0" rtlCol="0" anchor="ctr"/>
+          <a:lstStyle/>
+          <a:p>
+            <a:pPr algn="ctr" indent="0" marL="0">
+              <a:buNone/>
+            </a:pPr>
+            <a:r>
+              <a:rPr lang="en-US" sz="1300" b="1" dirty="0">
+                <a:solidFill>
+                  <a:srgbClr val="16242E"/>
+                </a:solidFill>
+                <a:latin typeface="Cambria" pitchFamily="34" charset="0"/>
+                <a:ea typeface="Cambria" pitchFamily="34" charset="-122"/>
+                <a:cs typeface="Cambria" pitchFamily="34" charset="-120"/>
+              </a:rPr>
+              <a:t>Quina càrrega haurà de suportar?</a:t>
+            </a:r>
+            <a:endParaRPr lang="en-US" sz="1300" dirty="0"/>
+          </a:p>
+        </p:txBody>
+      </p:sp>
+      <p:sp>
+        <p:nvSpPr>
+          <p:cNvPr id="8" name="Text 5"/>
+          <p:cNvSpPr txBox="1"/>
+          <p:nvPr/>
+        </p:nvSpPr>
+        <p:spPr>
+          <a:xfrm>
+            <a:off x="777240" y="3611880"/>
+            <a:ext cx="2926080" cy="548640"/>
+          </a:xfrm>
+          <a:prstGeom prst="rect">
+            <a:avLst/>
+          </a:prstGeom>
+          <a:noFill/>
+          <a:ln/>
+        </p:spPr>
+        <p:txBody>
+          <a:bodyPr wrap="square" lIns="0" tIns="0" rIns="0" bIns="0" rtlCol="0" anchor="ctr"/>
+          <a:lstStyle/>
+          <a:p>
+            <a:pPr algn="ctr" indent="0" marL="0">
+              <a:buNone/>
+            </a:pPr>
+            <a:r>
+              <a:rPr lang="en-US" sz="1100" dirty="0">
+                <a:solidFill>
+                  <a:srgbClr val="5B6B77"/>
+                </a:solidFill>
+                <a:latin typeface="Calibri" pitchFamily="34" charset="0"/>
+                <a:ea typeface="Calibri" pitchFamily="34" charset="-122"/>
+                <a:cs typeface="Calibri" pitchFamily="34" charset="-120"/>
+              </a:rPr>
+              <a:t>Suma la potència real (W) de tots els equips a protegir.</a:t>
+            </a:r>
+            <a:endParaRPr lang="en-US" sz="1100" dirty="0"/>
+          </a:p>
+        </p:txBody>
+      </p:sp>
+      <p:sp>
+        <p:nvSpPr>
+          <p:cNvPr id="9" name="Shape 6"/>
+          <p:cNvSpPr/>
+          <p:nvPr/>
+        </p:nvSpPr>
+        <p:spPr>
+          <a:xfrm>
+            <a:off x="4251960" y="1920240"/>
+            <a:ext cx="3383280" cy="2286000"/>
+          </a:xfrm>
+          <a:prstGeom prst="roundRect">
+            <a:avLst>
+              <a:gd name="adj" fmla="val 4800"/>
+            </a:avLst>
+          </a:prstGeom>
+          <a:solidFill>
+            <a:srgbClr val="FFFFFF"/>
+          </a:solidFill>
+          <a:ln/>
+          <a:effectLst>
+            <a:outerShdw sx="100000" sy="100000" kx="0" ky="0" algn="bl" rotWithShape="0" blurRad="76200" dist="25400" dir="5400000">
+              <a:srgbClr val="1B2A38">
+                <a:alpha val="12000"/>
+              </a:srgbClr>
+            </a:outerShdw>
+          </a:effectLst>
+        </p:spPr>
+        <p:txBody>
+          <a:bodyPr/>
+          <a:p/>
+        </p:txBody>
+      </p:sp>
+      <p:sp>
+        <p:nvSpPr>
+          <p:cNvPr id="10" name="Shape 7"/>
+          <p:cNvSpPr/>
+          <p:nvPr/>
+        </p:nvSpPr>
+        <p:spPr>
+          <a:xfrm>
+            <a:off x="5532120" y="2148840"/>
+            <a:ext cx="822960" cy="822960"/>
+          </a:xfrm>
+          <a:prstGeom prst="ellipse">
+            <a:avLst/>
+          </a:prstGeom>
+          <a:solidFill>
+            <a:srgbClr val="3E6680"/>
+          </a:solidFill>
+          <a:ln/>
+        </p:spPr>
+        <p:txBody>
+          <a:bodyPr/>
+          <a:p/>
+        </p:txBody>
+      </p:sp>
+      <p:pic>
+        <p:nvPicPr>
+          <p:cNvPr id="11" name="Image 1" descr="/home/claude/pptx_build/icons/clock.png">    </p:cNvPr>
+          <p:cNvPicPr>
+            <a:picLocks noChangeAspect="1"/>
+          </p:cNvPicPr>
+          <p:nvPr/>
+        </p:nvPicPr>
+        <p:blipFill>
+          <a:blip r:embed="rId2"/>
+          <a:stretch>
+            <a:fillRect/>
+          </a:stretch>
+        </p:blipFill>
+        <p:spPr>
+          <a:xfrm>
+            <a:off x="5737860" y="2354580"/>
+            <a:ext cx="411480" cy="411480"/>
+          </a:xfrm>
+          <a:prstGeom prst="rect">
+            <a:avLst/>
+          </a:prstGeom>
+        </p:spPr>
+      </p:pic>
+      <p:sp>
+        <p:nvSpPr>
+          <p:cNvPr id="12" name="Text 8"/>
+          <p:cNvSpPr txBox="1"/>
+          <p:nvPr/>
+        </p:nvSpPr>
+        <p:spPr>
+          <a:xfrm>
+            <a:off x="4434840" y="3063240"/>
+            <a:ext cx="3017520" cy="548640"/>
+          </a:xfrm>
+          <a:prstGeom prst="rect">
+            <a:avLst/>
+          </a:prstGeom>
+          <a:noFill/>
+          <a:ln/>
+        </p:spPr>
+        <p:txBody>
+          <a:bodyPr wrap="square" lIns="0" tIns="0" rIns="0" bIns="0" rtlCol="0" anchor="ctr"/>
+          <a:lstStyle/>
+          <a:p>
+            <a:pPr algn="ctr" indent="0" marL="0">
+              <a:buNone/>
+            </a:pPr>
+            <a:r>
+              <a:rPr lang="en-US" sz="1300" b="1" dirty="0">
+                <a:solidFill>
+                  <a:srgbClr val="16242E"/>
+                </a:solidFill>
+                <a:latin typeface="Cambria" pitchFamily="34" charset="0"/>
+                <a:ea typeface="Cambria" pitchFamily="34" charset="-122"/>
+                <a:cs typeface="Cambria" pitchFamily="34" charset="-120"/>
+              </a:rPr>
+              <a:t>Quanta autonomia vols?</a:t>
+            </a:r>
+            <a:endParaRPr lang="en-US" sz="1300" dirty="0"/>
+          </a:p>
+        </p:txBody>
+      </p:sp>
+      <p:sp>
+        <p:nvSpPr>
+          <p:cNvPr id="13" name="Text 9"/>
+          <p:cNvSpPr txBox="1"/>
+          <p:nvPr/>
+        </p:nvSpPr>
+        <p:spPr>
+          <a:xfrm>
+            <a:off x="4480560" y="3611880"/>
+            <a:ext cx="2926080" cy="548640"/>
+          </a:xfrm>
+          <a:prstGeom prst="rect">
+            <a:avLst/>
+          </a:prstGeom>
+          <a:noFill/>
+          <a:ln/>
+        </p:spPr>
+        <p:txBody>
+          <a:bodyPr wrap="square" lIns="0" tIns="0" rIns="0" bIns="0" rtlCol="0" anchor="ctr"/>
+          <a:lstStyle/>
+          <a:p>
+            <a:pPr algn="ctr" indent="0" marL="0">
+              <a:buNone/>
+            </a:pPr>
+            <a:r>
+              <a:rPr lang="en-US" sz="1100" dirty="0">
+                <a:solidFill>
+                  <a:srgbClr val="5B6B77"/>
+                </a:solidFill>
+                <a:latin typeface="Calibri" pitchFamily="34" charset="0"/>
+                <a:ea typeface="Calibri" pitchFamily="34" charset="-122"/>
+                <a:cs typeface="Calibri" pitchFamily="34" charset="-120"/>
+              </a:rPr>
+              <a:t>Pocs minuts per aturar equips, o hores per a un servidor crític.</a:t>
+            </a:r>
+            <a:endParaRPr lang="en-US" sz="1100" dirty="0"/>
+          </a:p>
+        </p:txBody>
+      </p:sp>
+      <p:sp>
+        <p:nvSpPr>
+          <p:cNvPr id="14" name="Shape 10"/>
+          <p:cNvSpPr/>
+          <p:nvPr/>
+        </p:nvSpPr>
+        <p:spPr>
+          <a:xfrm>
+            <a:off x="7955280" y="1920240"/>
+            <a:ext cx="3383280" cy="2286000"/>
+          </a:xfrm>
+          <a:prstGeom prst="roundRect">
+            <a:avLst>
+              <a:gd name="adj" fmla="val 4800"/>
+            </a:avLst>
+          </a:prstGeom>
+          <a:solidFill>
+            <a:srgbClr val="FFFFFF"/>
+          </a:solidFill>
+          <a:ln/>
+          <a:effectLst>
+            <a:outerShdw sx="100000" sy="100000" kx="0" ky="0" algn="bl" rotWithShape="0" blurRad="76200" dist="25400" dir="5400000">
+              <a:srgbClr val="1B2A38">
+                <a:alpha val="12000"/>
+              </a:srgbClr>
+            </a:outerShdw>
+          </a:effectLst>
+        </p:spPr>
+        <p:txBody>
+          <a:bodyPr/>
+          <a:p/>
+        </p:txBody>
+      </p:sp>
+      <p:sp>
+        <p:nvSpPr>
+          <p:cNvPr id="15" name="Shape 11"/>
+          <p:cNvSpPr/>
+          <p:nvPr/>
+        </p:nvSpPr>
+        <p:spPr>
+          <a:xfrm>
+            <a:off x="9235440" y="2148840"/>
+            <a:ext cx="822960" cy="822960"/>
+          </a:xfrm>
+          <a:prstGeom prst="ellipse">
+            <a:avLst/>
+          </a:prstGeom>
+          <a:solidFill>
+            <a:srgbClr val="3E6680"/>
+          </a:solidFill>
+          <a:ln/>
+        </p:spPr>
+        <p:txBody>
+          <a:bodyPr/>
+          <a:p/>
+        </p:txBody>
+      </p:sp>
+      <p:pic>
+        <p:nvPicPr>
+          <p:cNvPr id="16" name="Image 2" descr="/home/claude/pptx_build/icons/map.png">    </p:cNvPr>
+          <p:cNvPicPr>
+            <a:picLocks noChangeAspect="1"/>
+          </p:cNvPicPr>
+          <p:nvPr/>
+        </p:nvPicPr>
+        <p:blipFill>
+          <a:blip r:embed="rId3"/>
+          <a:stretch>
+            <a:fillRect/>
+          </a:stretch>
+        </p:blipFill>
+        <p:spPr>
+          <a:xfrm>
+            <a:off x="9441180" y="2354580"/>
+            <a:ext cx="411480" cy="411480"/>
+          </a:xfrm>
+          <a:prstGeom prst="rect">
+            <a:avLst/>
+          </a:prstGeom>
+        </p:spPr>
+      </p:pic>
+      <p:sp>
+        <p:nvSpPr>
+          <p:cNvPr id="17" name="Text 12"/>
+          <p:cNvSpPr txBox="1"/>
+          <p:nvPr/>
+        </p:nvSpPr>
+        <p:spPr>
+          <a:xfrm>
+            <a:off x="8138160" y="3063240"/>
+            <a:ext cx="3017520" cy="548640"/>
+          </a:xfrm>
+          <a:prstGeom prst="rect">
+            <a:avLst/>
+          </a:prstGeom>
+          <a:noFill/>
+          <a:ln/>
+        </p:spPr>
+        <p:txBody>
+          <a:bodyPr wrap="square" lIns="0" tIns="0" rIns="0" bIns="0" rtlCol="0" anchor="ctr"/>
+          <a:lstStyle/>
+          <a:p>
+            <a:pPr algn="ctr" indent="0" marL="0">
+              <a:buNone/>
+            </a:pPr>
+            <a:r>
+              <a:rPr lang="en-US" sz="1300" b="1" dirty="0">
+                <a:solidFill>
+                  <a:srgbClr val="16242E"/>
+                </a:solidFill>
+                <a:latin typeface="Cambria" pitchFamily="34" charset="0"/>
+                <a:ea typeface="Cambria" pitchFamily="34" charset="-122"/>
+                <a:cs typeface="Cambria" pitchFamily="34" charset="-120"/>
+              </a:rPr>
+              <a:t>De quin espai disposes?</a:t>
+            </a:r>
+            <a:endParaRPr lang="en-US" sz="1300" dirty="0"/>
+          </a:p>
+        </p:txBody>
+      </p:sp>
+      <p:sp>
+        <p:nvSpPr>
+          <p:cNvPr id="18" name="Text 13"/>
+          <p:cNvSpPr txBox="1"/>
+          <p:nvPr/>
+        </p:nvSpPr>
+        <p:spPr>
+          <a:xfrm>
+            <a:off x="8183880" y="3611880"/>
+            <a:ext cx="2926080" cy="548640"/>
+          </a:xfrm>
+          <a:prstGeom prst="rect">
+            <a:avLst/>
+          </a:prstGeom>
+          <a:noFill/>
+          <a:ln/>
+        </p:spPr>
+        <p:txBody>
+          <a:bodyPr wrap="square" lIns="0" tIns="0" rIns="0" bIns="0" rtlCol="0" anchor="ctr"/>
+          <a:lstStyle/>
+          <a:p>
+            <a:pPr algn="ctr" indent="0" marL="0">
+              <a:buNone/>
+            </a:pPr>
+            <a:r>
+              <a:rPr lang="en-US" sz="1100" dirty="0">
+                <a:solidFill>
+                  <a:srgbClr val="5B6B77"/>
+                </a:solidFill>
+                <a:latin typeface="Calibri" pitchFamily="34" charset="0"/>
+                <a:ea typeface="Calibri" pitchFamily="34" charset="-122"/>
+                <a:cs typeface="Calibri" pitchFamily="34" charset="-120"/>
+              </a:rPr>
+              <a:t>Cal lloc a prop dels equips i bona ventilació.</a:t>
+            </a:r>
+            <a:endParaRPr lang="en-US" sz="1100" dirty="0"/>
+          </a:p>
+        </p:txBody>
+      </p:sp>
+      <p:sp>
+        <p:nvSpPr>
+          <p:cNvPr id="19" name="Shape 14"/>
+          <p:cNvSpPr/>
+          <p:nvPr/>
+        </p:nvSpPr>
+        <p:spPr>
+          <a:xfrm>
+            <a:off x="548640" y="4526280"/>
+            <a:ext cx="10607040" cy="1371600"/>
+          </a:xfrm>
+          <a:prstGeom prst="roundRect">
+            <a:avLst>
+              <a:gd name="adj" fmla="val 8000"/>
+            </a:avLst>
+          </a:prstGeom>
+          <a:solidFill>
+            <a:srgbClr val="13293D"/>
+          </a:solidFill>
+          <a:ln/>
+        </p:spPr>
+        <p:txBody>
+          <a:bodyPr/>
+          <a:p/>
+        </p:txBody>
+      </p:sp>
+      <p:sp>
+        <p:nvSpPr>
+          <p:cNvPr id="20" name="Shape 15"/>
+          <p:cNvSpPr/>
+          <p:nvPr/>
+        </p:nvSpPr>
+        <p:spPr>
+          <a:xfrm>
+            <a:off x="1005840" y="4754880"/>
+            <a:ext cx="914400" cy="914400"/>
+          </a:xfrm>
+          <a:prstGeom prst="ellipse">
+            <a:avLst/>
+          </a:prstGeom>
+          <a:solidFill>
+            <a:srgbClr val="F2A541"/>
+          </a:solidFill>
+          <a:ln/>
+        </p:spPr>
+        <p:txBody>
+          <a:bodyPr/>
+          <a:p/>
+        </p:txBody>
+      </p:sp>
+      <p:pic>
+        <p:nvPicPr>
+          <p:cNvPr id="21" name="Image 3" descr="/home/claude/pptx_build/icons/thermometer.png">    </p:cNvPr>
+          <p:cNvPicPr>
+            <a:picLocks noChangeAspect="1"/>
+          </p:cNvPicPr>
+          <p:nvPr/>
+        </p:nvPicPr>
+        <p:blipFill>
+          <a:blip r:embed="rId4"/>
+          <a:stretch>
+            <a:fillRect/>
+          </a:stretch>
+        </p:blipFill>
+        <p:spPr>
+          <a:xfrm>
+            <a:off x="1234440" y="4983480"/>
+            <a:ext cx="457200" cy="457200"/>
+          </a:xfrm>
+          <a:prstGeom prst="rect">
+            <a:avLst/>
+          </a:prstGeom>
+        </p:spPr>
+      </p:pic>
+      <p:sp>
+        <p:nvSpPr>
+          <p:cNvPr id="22" name="Text 16"/>
+          <p:cNvSpPr txBox="1"/>
+          <p:nvPr/>
+        </p:nvSpPr>
+        <p:spPr>
+          <a:xfrm>
+            <a:off x="2194560" y="4663440"/>
+            <a:ext cx="8595360" cy="1097280"/>
+          </a:xfrm>
+          <a:prstGeom prst="rect">
+            <a:avLst/>
+          </a:prstGeom>
+          <a:noFill/>
+          <a:ln/>
+        </p:spPr>
+        <p:txBody>
+          <a:bodyPr wrap="square" lIns="0" tIns="0" rIns="0" bIns="0" rtlCol="0" anchor="ctr"/>
+          <a:lstStyle/>
+          <a:p>
+            <a:pPr indent="0" marL="0">
+              <a:buNone/>
+            </a:pPr>
+            <a:r>
+              <a:rPr lang="en-US" sz="1350" dirty="0">
+                <a:solidFill>
+                  <a:srgbClr val="E4ECF1"/>
+                </a:solidFill>
+                <a:latin typeface="Calibri" pitchFamily="34" charset="0"/>
+                <a:ea typeface="Calibri" pitchFamily="34" charset="-122"/>
+                <a:cs typeface="Calibri" pitchFamily="34" charset="-120"/>
+              </a:rPr>
+              <a:t>Alguns SAI generen molta calor. Si la sala no està ben climatitzada, poden malmetre el propi maquinari que haurien de protegir. I recorda: cables sempre ben recollits, mai enmig del pas.</a:t>
+            </a:r>
+            <a:endParaRPr lang="en-US" sz="1350" dirty="0"/>
+          </a:p>
+        </p:txBody>
+      </p:sp>
+      <p:sp>
+        <p:nvSpPr>
+          <p:cNvPr id="23" name="Text 17"/>
+          <p:cNvSpPr txBox="1"/>
+          <p:nvPr/>
+        </p:nvSpPr>
+        <p:spPr>
+          <a:xfrm>
+            <a:off x="11548872" y="6446520"/>
+            <a:ext cx="365760" cy="274320"/>
+          </a:xfrm>
+          <a:prstGeom prst="rect">
+            <a:avLst/>
+          </a:prstGeom>
+          <a:noFill/>
+          <a:ln/>
+        </p:spPr>
+        <p:txBody>
+          <a:bodyPr wrap="square" lIns="0" tIns="0" rIns="0" bIns="0" rtlCol="0" anchor="ctr"/>
+          <a:lstStyle/>
+          <a:p>
+            <a:pPr algn="r" indent="0" marL="0">
+              <a:buNone/>
+            </a:pPr>
+            <a:r>
+              <a:rPr lang="en-US" sz="1000" dirty="0">
+                <a:solidFill>
+                  <a:srgbClr val="5B6B77"/>
+                </a:solidFill>
+                <a:latin typeface="Calibri" pitchFamily="34" charset="0"/>
+                <a:ea typeface="Calibri" pitchFamily="34" charset="-122"/>
+                <a:cs typeface="Calibri" pitchFamily="34" charset="-120"/>
+              </a:rPr>
+              <a:t>21</a:t>
+            </a:r>
+            <a:endParaRPr lang="en-US" sz="1000" dirty="0"/>
+          </a:p>
+        </p:txBody>
+      </p:sp>
+    </p:spTree>
+  </p:cSld>
+  <p:clrMapOvr>
+    <a:masterClrMapping/>
+  </p:clrMapOvr>
+</p:sld>
+</file>
+
+<file path=ppt/slides/slide22.xml><?xml version="1.0" encoding="utf-8"?>
+<p:sld xmlns:a="http://schemas.openxmlformats.org/drawingml/2006/main" xmlns:r="http://schemas.openxmlformats.org/officeDocument/2006/relationships" xmlns:p="http://schemas.openxmlformats.org/presentationml/2006/main">
+  <p:cSld name="Slide 18">
+    <p:bg>
+      <p:bgPr>
+        <a:solidFill>
+          <a:srgbClr val="13293D"/>
+        </a:solidFill>
+      </p:bgPr>
+    </p:bg>
+    <p:spTree>
+      <p:nvGrpSpPr>
+        <p:cNvPr id="1" name=""/>
+        <p:cNvGrpSpPr/>
+        <p:nvPr/>
+      </p:nvGrpSpPr>
+      <p:grpSpPr>
+        <a:xfrm>
+          <a:off x="0" y="0"/>
+          <a:ext cx="0" cy="0"/>
+          <a:chOff x="0" y="0"/>
+          <a:chExt cx="0" cy="0"/>
+        </a:xfrm>
+      </p:grpSpPr>
+      <p:sp>
+        <p:nvSpPr>
+          <p:cNvPr id="2" name="Text 0"/>
+          <p:cNvSpPr txBox="1"/>
+          <p:nvPr/>
+        </p:nvSpPr>
+        <p:spPr>
+          <a:xfrm>
+            <a:off x="548640" y="411480"/>
+            <a:ext cx="7315200" cy="320040"/>
+          </a:xfrm>
+          <a:prstGeom prst="rect">
+            <a:avLst/>
+          </a:prstGeom>
+          <a:noFill/>
+          <a:ln/>
+        </p:spPr>
+        <p:txBody>
+          <a:bodyPr wrap="square" lIns="0" tIns="0" rIns="0" bIns="0" rtlCol="0" anchor="ctr"/>
+          <a:lstStyle/>
+          <a:p>
+            <a:pPr indent="0" marL="0">
+              <a:buNone/>
+            </a:pPr>
+            <a:r>
+              <a:rPr lang="en-US" sz="1300" b="1" spc="200" kern="0" dirty="0">
+                <a:solidFill>
+                  <a:srgbClr val="F2A541"/>
+                </a:solidFill>
+                <a:latin typeface="Calibri" pitchFamily="34" charset="0"/>
+                <a:ea typeface="Calibri" pitchFamily="34" charset="-122"/>
+                <a:cs typeface="Calibri" pitchFamily="34" charset="-120"/>
+              </a:rPr>
+              <a:t>PER ACABAR</a:t>
+            </a:r>
+            <a:endParaRPr lang="en-US" sz="1300" dirty="0"/>
+          </a:p>
+        </p:txBody>
+      </p:sp>
+      <p:sp>
+        <p:nvSpPr>
+          <p:cNvPr id="3" name="Text 1"/>
+          <p:cNvSpPr txBox="1"/>
+          <p:nvPr/>
+        </p:nvSpPr>
+        <p:spPr>
+          <a:xfrm>
+            <a:off x="548640" y="685800"/>
+            <a:ext cx="9144000" cy="822960"/>
+          </a:xfrm>
+          <a:prstGeom prst="rect">
+            <a:avLst/>
+          </a:prstGeom>
+          <a:noFill/>
+          <a:ln/>
+        </p:spPr>
+        <p:txBody>
+          <a:bodyPr wrap="square" lIns="0" tIns="0" rIns="0" bIns="0" rtlCol="0" anchor="ctr"/>
+          <a:lstStyle/>
+          <a:p>
+            <a:pPr indent="0" marL="0">
+              <a:buNone/>
+            </a:pPr>
+            <a:r>
+              <a:rPr lang="en-US" sz="3200" b="1" dirty="0">
+                <a:solidFill>
+                  <a:srgbClr val="FFFFFF"/>
+                </a:solidFill>
+                <a:latin typeface="Cambria" pitchFamily="34" charset="0"/>
+                <a:ea typeface="Cambria" pitchFamily="34" charset="-122"/>
+                <a:cs typeface="Cambria" pitchFamily="34" charset="-120"/>
+              </a:rPr>
+              <a:t>Idees clau d'avui</a:t>
+            </a:r>
+            <a:endParaRPr lang="en-US" sz="3200" dirty="0"/>
+          </a:p>
+        </p:txBody>
+      </p:sp>
+      <p:sp>
+        <p:nvSpPr>
+          <p:cNvPr id="4" name="Shape 2"/>
+          <p:cNvSpPr/>
+          <p:nvPr/>
+        </p:nvSpPr>
+        <p:spPr>
+          <a:xfrm>
+            <a:off x="594360" y="2011680"/>
+            <a:ext cx="914400" cy="914400"/>
+          </a:xfrm>
+          <a:prstGeom prst="ellipse">
+            <a:avLst/>
+          </a:prstGeom>
+          <a:solidFill>
+            <a:srgbClr val="F2A541"/>
+          </a:solidFill>
+          <a:ln/>
+        </p:spPr>
+        <p:txBody>
+          <a:bodyPr/>
+          <a:p/>
+        </p:txBody>
+      </p:sp>
+      <p:pic>
+        <p:nvPicPr>
+          <p:cNvPr id="5" name="Image 0" descr="/home/claude/pptx_build/icons/warning.png">    </p:cNvPr>
+          <p:cNvPicPr>
+            <a:picLocks noChangeAspect="1"/>
+          </p:cNvPicPr>
+          <p:nvPr/>
+        </p:nvPicPr>
+        <p:blipFill>
+          <a:blip r:embed="rId1"/>
+          <a:stretch>
+            <a:fillRect/>
+          </a:stretch>
+        </p:blipFill>
+        <p:spPr>
+          <a:xfrm>
+            <a:off x="822960" y="2240280"/>
+            <a:ext cx="457200" cy="457200"/>
+          </a:xfrm>
+          <a:prstGeom prst="rect">
+            <a:avLst/>
+          </a:prstGeom>
+        </p:spPr>
+      </p:pic>
+      <p:sp>
+        <p:nvSpPr>
+          <p:cNvPr id="6" name="Text 3"/>
+          <p:cNvSpPr txBox="1"/>
+          <p:nvPr/>
+        </p:nvSpPr>
+        <p:spPr>
+          <a:xfrm>
+            <a:off x="1691640" y="1965960"/>
+            <a:ext cx="3840480" cy="1005840"/>
+          </a:xfrm>
+          <a:prstGeom prst="rect">
+            <a:avLst/>
+          </a:prstGeom>
+          <a:noFill/>
+          <a:ln/>
+        </p:spPr>
+        <p:txBody>
+          <a:bodyPr wrap="square" lIns="0" tIns="0" rIns="0" bIns="0" rtlCol="0" anchor="ctr"/>
+          <a:lstStyle/>
+          <a:p>
+            <a:pPr indent="0" marL="0">
+              <a:buNone/>
+            </a:pPr>
+            <a:r>
+              <a:rPr lang="en-US" sz="1350" dirty="0">
+                <a:solidFill>
+                  <a:srgbClr val="FFFFFF"/>
+                </a:solidFill>
+                <a:latin typeface="Calibri" pitchFamily="34" charset="0"/>
+                <a:ea typeface="Calibri" pitchFamily="34" charset="-122"/>
+                <a:cs typeface="Calibri" pitchFamily="34" charset="-120"/>
+              </a:rPr>
+              <a:t>4 problemes elèctrics: apagades, sobretensions, baixades de tensió i variació de freqüència.</a:t>
+            </a:r>
+            <a:endParaRPr lang="en-US" sz="1350" dirty="0"/>
+          </a:p>
+        </p:txBody>
+      </p:sp>
+      <p:sp>
+        <p:nvSpPr>
+          <p:cNvPr id="7" name="Shape 4"/>
+          <p:cNvSpPr/>
+          <p:nvPr/>
+        </p:nvSpPr>
+        <p:spPr>
+          <a:xfrm>
+            <a:off x="6172200" y="2011680"/>
+            <a:ext cx="914400" cy="914400"/>
+          </a:xfrm>
+          <a:prstGeom prst="ellipse">
+            <a:avLst/>
+          </a:prstGeom>
+          <a:solidFill>
+            <a:srgbClr val="3E6680"/>
+          </a:solidFill>
+          <a:ln/>
+        </p:spPr>
+        <p:txBody>
+          <a:bodyPr/>
+          <a:p/>
+        </p:txBody>
+      </p:sp>
+      <p:pic>
+        <p:nvPicPr>
+          <p:cNvPr id="8" name="Image 1" descr="/home/claude/pptx_build/icons/battery.png">    </p:cNvPr>
+          <p:cNvPicPr>
+            <a:picLocks noChangeAspect="1"/>
+          </p:cNvPicPr>
+          <p:nvPr/>
+        </p:nvPicPr>
+        <p:blipFill>
+          <a:blip r:embed="rId2"/>
+          <a:stretch>
+            <a:fillRect/>
+          </a:stretch>
+        </p:blipFill>
+        <p:spPr>
+          <a:xfrm>
+            <a:off x="6400800" y="2240280"/>
+            <a:ext cx="457200" cy="457200"/>
+          </a:xfrm>
+          <a:prstGeom prst="rect">
+            <a:avLst/>
+          </a:prstGeom>
+        </p:spPr>
+      </p:pic>
+      <p:sp>
+        <p:nvSpPr>
+          <p:cNvPr id="9" name="Text 5"/>
+          <p:cNvSpPr txBox="1"/>
+          <p:nvPr/>
+        </p:nvSpPr>
+        <p:spPr>
+          <a:xfrm>
+            <a:off x="7269480" y="1965960"/>
+            <a:ext cx="3840480" cy="1005840"/>
+          </a:xfrm>
+          <a:prstGeom prst="rect">
+            <a:avLst/>
+          </a:prstGeom>
+          <a:noFill/>
+          <a:ln/>
+        </p:spPr>
+        <p:txBody>
+          <a:bodyPr wrap="square" lIns="0" tIns="0" rIns="0" bIns="0" rtlCol="0" anchor="ctr"/>
+          <a:lstStyle/>
+          <a:p>
+            <a:pPr indent="0" marL="0">
+              <a:buNone/>
+            </a:pPr>
+            <a:r>
+              <a:rPr lang="en-US" sz="1350" dirty="0">
+                <a:solidFill>
+                  <a:srgbClr val="FFFFFF"/>
+                </a:solidFill>
+                <a:latin typeface="Calibri" pitchFamily="34" charset="0"/>
+                <a:ea typeface="Calibri" pitchFamily="34" charset="-122"/>
+                <a:cs typeface="Calibri" pitchFamily="34" charset="-120"/>
+              </a:rPr>
+              <a:t>Un SAI combina bateria + protecció elèctrica per als equips connectats.</a:t>
+            </a:r>
+            <a:endParaRPr lang="en-US" sz="1350" dirty="0"/>
+          </a:p>
+        </p:txBody>
+      </p:sp>
+      <p:sp>
+        <p:nvSpPr>
+          <p:cNvPr id="10" name="Shape 6"/>
+          <p:cNvSpPr/>
+          <p:nvPr/>
+        </p:nvSpPr>
+        <p:spPr>
+          <a:xfrm>
+            <a:off x="594360" y="4114800"/>
+            <a:ext cx="914400" cy="914400"/>
+          </a:xfrm>
+          <a:prstGeom prst="ellipse">
+            <a:avLst/>
+          </a:prstGeom>
+          <a:solidFill>
+            <a:srgbClr val="F2A541"/>
+          </a:solidFill>
+          <a:ln/>
+        </p:spPr>
+        <p:txBody>
+          <a:bodyPr/>
+          <a:p/>
+        </p:txBody>
+      </p:sp>
+      <p:pic>
+        <p:nvPicPr>
+          <p:cNvPr id="11" name="Image 2" descr="/home/claude/pptx_build/icons/exchange.png">    </p:cNvPr>
+          <p:cNvPicPr>
+            <a:picLocks noChangeAspect="1"/>
+          </p:cNvPicPr>
+          <p:nvPr/>
+        </p:nvPicPr>
+        <p:blipFill>
+          <a:blip r:embed="rId3"/>
+          <a:stretch>
+            <a:fillRect/>
+          </a:stretch>
+        </p:blipFill>
+        <p:spPr>
+          <a:xfrm>
+            <a:off x="822960" y="4343400"/>
+            <a:ext cx="457200" cy="457200"/>
+          </a:xfrm>
+          <a:prstGeom prst="rect">
+            <a:avLst/>
+          </a:prstGeom>
+        </p:spPr>
+      </p:pic>
+      <p:sp>
+        <p:nvSpPr>
+          <p:cNvPr id="12" name="Text 7"/>
+          <p:cNvSpPr txBox="1"/>
+          <p:nvPr/>
+        </p:nvSpPr>
+        <p:spPr>
+          <a:xfrm>
+            <a:off x="1691640" y="4069080"/>
+            <a:ext cx="3840480" cy="1005840"/>
+          </a:xfrm>
+          <a:prstGeom prst="rect">
+            <a:avLst/>
+          </a:prstGeom>
+          <a:noFill/>
+          <a:ln/>
+        </p:spPr>
+        <p:txBody>
+          <a:bodyPr wrap="square" lIns="0" tIns="0" rIns="0" bIns="0" rtlCol="0" anchor="ctr"/>
+          <a:lstStyle/>
+          <a:p>
+            <a:pPr indent="0" marL="0">
+              <a:buNone/>
+            </a:pPr>
+            <a:r>
+              <a:rPr lang="en-US" sz="1350" dirty="0">
+                <a:solidFill>
+                  <a:srgbClr val="FFFFFF"/>
+                </a:solidFill>
+                <a:latin typeface="Calibri" pitchFamily="34" charset="0"/>
+                <a:ea typeface="Calibri" pitchFamily="34" charset="-122"/>
+                <a:cs typeface="Calibri" pitchFamily="34" charset="-120"/>
+              </a:rPr>
+              <a:t>3 tipus de SAI: standby, interactiu de línia i online (sense temps de transferència).</a:t>
+            </a:r>
+            <a:endParaRPr lang="en-US" sz="1350" dirty="0"/>
+          </a:p>
+        </p:txBody>
+      </p:sp>
+      <p:sp>
+        <p:nvSpPr>
+          <p:cNvPr id="13" name="Shape 8"/>
+          <p:cNvSpPr/>
+          <p:nvPr/>
+        </p:nvSpPr>
+        <p:spPr>
+          <a:xfrm>
+            <a:off x="6172200" y="4114800"/>
+            <a:ext cx="914400" cy="914400"/>
+          </a:xfrm>
+          <a:prstGeom prst="ellipse">
+            <a:avLst/>
+          </a:prstGeom>
+          <a:solidFill>
+            <a:srgbClr val="3E6680"/>
+          </a:solidFill>
+          <a:ln/>
+        </p:spPr>
+        <p:txBody>
+          <a:bodyPr/>
+          <a:p/>
+        </p:txBody>
+      </p:sp>
+      <p:pic>
+        <p:nvPicPr>
+          <p:cNvPr id="14" name="Image 3" descr="/home/claude/pptx_build/icons/gauge.png">    </p:cNvPr>
+          <p:cNvPicPr>
+            <a:picLocks noChangeAspect="1"/>
+          </p:cNvPicPr>
+          <p:nvPr/>
+        </p:nvPicPr>
+        <p:blipFill>
+          <a:blip r:embed="rId4"/>
+          <a:stretch>
+            <a:fillRect/>
+          </a:stretch>
+        </p:blipFill>
+        <p:spPr>
+          <a:xfrm>
+            <a:off x="6400800" y="4343400"/>
+            <a:ext cx="457200" cy="457200"/>
+          </a:xfrm>
+          <a:prstGeom prst="rect">
+            <a:avLst/>
+          </a:prstGeom>
+        </p:spPr>
+      </p:pic>
+      <p:sp>
+        <p:nvSpPr>
+          <p:cNvPr id="15" name="Text 9"/>
+          <p:cNvSpPr txBox="1"/>
+          <p:nvPr/>
+        </p:nvSpPr>
+        <p:spPr>
+          <a:xfrm>
+            <a:off x="7269480" y="4069080"/>
+            <a:ext cx="3840480" cy="1005840"/>
+          </a:xfrm>
+          <a:prstGeom prst="rect">
+            <a:avLst/>
+          </a:prstGeom>
+          <a:noFill/>
+          <a:ln/>
+        </p:spPr>
+        <p:txBody>
+          <a:bodyPr wrap="square" lIns="0" tIns="0" rIns="0" bIns="0" rtlCol="0" anchor="ctr"/>
+          <a:lstStyle/>
+          <a:p>
+            <a:pPr indent="0" marL="0">
+              <a:buNone/>
+            </a:pPr>
+            <a:r>
+              <a:rPr lang="en-US" sz="1350" dirty="0">
+                <a:solidFill>
+                  <a:srgbClr val="FFFFFF"/>
+                </a:solidFill>
+                <a:latin typeface="Calibri" pitchFamily="34" charset="0"/>
+                <a:ea typeface="Calibri" pitchFamily="34" charset="-122"/>
+                <a:cs typeface="Calibri" pitchFamily="34" charset="-120"/>
+              </a:rPr>
+              <a:t>Escollir un SAI: calcula la càrrega en watts (W), mai en VA, i pensa l'autonomia que necessites.</a:t>
+            </a:r>
+            <a:endParaRPr lang="en-US" sz="1350" dirty="0"/>
+          </a:p>
+        </p:txBody>
+      </p:sp>
+      <p:sp>
+        <p:nvSpPr>
+          <p:cNvPr id="16" name="Text 10"/>
+          <p:cNvSpPr txBox="1"/>
+          <p:nvPr/>
+        </p:nvSpPr>
+        <p:spPr>
+          <a:xfrm>
+            <a:off x="11548872" y="6446520"/>
+            <a:ext cx="365760" cy="274320"/>
+          </a:xfrm>
+          <a:prstGeom prst="rect">
+            <a:avLst/>
+          </a:prstGeom>
+          <a:noFill/>
+          <a:ln/>
+        </p:spPr>
+        <p:txBody>
+          <a:bodyPr wrap="square" lIns="0" tIns="0" rIns="0" bIns="0" rtlCol="0" anchor="ctr"/>
+          <a:lstStyle/>
+          <a:p>
+            <a:pPr algn="r" indent="0" marL="0">
+              <a:buNone/>
+            </a:pPr>
+            <a:r>
+              <a:rPr lang="en-US" sz="1000" dirty="0">
+                <a:solidFill>
+                  <a:srgbClr val="5B6B77"/>
+                </a:solidFill>
+                <a:latin typeface="Calibri" pitchFamily="34" charset="0"/>
+                <a:ea typeface="Calibri" pitchFamily="34" charset="-122"/>
+                <a:cs typeface="Calibri" pitchFamily="34" charset="-120"/>
+              </a:rPr>
+              <a:t>22</a:t>
+            </a:r>
+            <a:endParaRPr lang="en-US" sz="1000" dirty="0"/>
+          </a:p>
+        </p:txBody>
+      </p:sp>
+    </p:spTree>
+  </p:cSld>
+  <p:clrMapOvr>
+    <a:masterClrMapping/>
+  </p:clrMapOvr>
+</p:sld>
+</file>
+
+<file path=ppt/slides/slide23.xml><?xml version="1.0" encoding="utf-8"?>
+<p:sld xmlns:a="http://schemas.openxmlformats.org/drawingml/2006/main" xmlns:r="http://schemas.openxmlformats.org/officeDocument/2006/relationships" xmlns:p="http://schemas.openxmlformats.org/presentationml/2006/main">
+  <p:cSld name="Slide 19">
+    <p:bg>
+      <p:bgPr>
+        <a:solidFill>
+          <a:srgbClr val="F2A541"/>
+        </a:solidFill>
+      </p:bgPr>
+    </p:bg>
+    <p:spTree>
+      <p:nvGrpSpPr>
+        <p:cNvPr id="1" name=""/>
+        <p:cNvGrpSpPr/>
+        <p:nvPr/>
+      </p:nvGrpSpPr>
+      <p:grpSpPr>
+        <a:xfrm>
+          <a:off x="0" y="0"/>
+          <a:ext cx="0" cy="0"/>
+          <a:chOff x="0" y="0"/>
+          <a:chExt cx="0" cy="0"/>
+        </a:xfrm>
+      </p:grpSpPr>
+      <p:sp>
+        <p:nvSpPr>
+          <p:cNvPr id="2" name="Shape 0"/>
+          <p:cNvSpPr/>
+          <p:nvPr/>
+        </p:nvSpPr>
+        <p:spPr>
+          <a:xfrm>
+            <a:off x="8686800" y="-1828800"/>
+            <a:ext cx="5486400" cy="5486400"/>
+          </a:xfrm>
+          <a:prstGeom prst="ellipse">
+            <a:avLst/>
+          </a:prstGeom>
+          <a:solidFill>
+            <a:srgbClr val="FFFFFF">
+              <a:alpha val="20000"/>
+            </a:srgbClr>
+          </a:solidFill>
+          <a:ln/>
+        </p:spPr>
+        <p:txBody>
+          <a:bodyPr/>
+          <a:p/>
+        </p:txBody>
+      </p:sp>
+      <p:sp>
+        <p:nvSpPr>
+          <p:cNvPr id="3" name="Shape 1"/>
+          <p:cNvSpPr/>
+          <p:nvPr/>
+        </p:nvSpPr>
+        <p:spPr>
+          <a:xfrm>
+            <a:off x="1051560" y="2651760"/>
+            <a:ext cx="1554480" cy="1554480"/>
+          </a:xfrm>
+          <a:prstGeom prst="ellipse">
+            <a:avLst/>
+          </a:prstGeom>
+          <a:solidFill>
+            <a:srgbClr val="13293D"/>
+          </a:solidFill>
+          <a:ln/>
+        </p:spPr>
+        <p:txBody>
+          <a:bodyPr/>
+          <a:p/>
+        </p:txBody>
+      </p:sp>
+      <p:pic>
+        <p:nvPicPr>
+          <p:cNvPr id="4" name="Image 0" descr="/home/claude/pptx_build/icons/question.png">    </p:cNvPr>
+          <p:cNvPicPr>
+            <a:picLocks noChangeAspect="1"/>
+          </p:cNvPicPr>
+          <p:nvPr/>
+        </p:nvPicPr>
+        <p:blipFill>
+          <a:blip r:embed="rId1"/>
+          <a:stretch>
+            <a:fillRect/>
+          </a:stretch>
+        </p:blipFill>
+        <p:spPr>
+          <a:xfrm>
+            <a:off x="1401318" y="3001518"/>
+            <a:ext cx="854964" cy="854964"/>
+          </a:xfrm>
+          <a:prstGeom prst="rect">
+            <a:avLst/>
+          </a:prstGeom>
+        </p:spPr>
+      </p:pic>
+      <p:sp>
+        <p:nvSpPr>
+          <p:cNvPr id="5" name="Text 2"/>
+          <p:cNvSpPr txBox="1"/>
+          <p:nvPr/>
+        </p:nvSpPr>
+        <p:spPr>
+          <a:xfrm>
+            <a:off x="3291840" y="1828800"/>
+            <a:ext cx="8229600" cy="365760"/>
+          </a:xfrm>
+          <a:prstGeom prst="rect">
+            <a:avLst/>
+          </a:prstGeom>
+          <a:noFill/>
+          <a:ln/>
+        </p:spPr>
+        <p:txBody>
+          <a:bodyPr wrap="square" lIns="0" tIns="0" rIns="0" bIns="0" rtlCol="0" anchor="ctr"/>
+          <a:lstStyle/>
+          <a:p>
+            <a:pPr indent="0" marL="0">
+              <a:buNone/>
+            </a:pPr>
+            <a:r>
+              <a:rPr lang="en-US" sz="1400" b="1" spc="200" kern="0" dirty="0">
+                <a:solidFill>
+                  <a:srgbClr val="0B1B29"/>
+                </a:solidFill>
+                <a:latin typeface="Calibri" pitchFamily="34" charset="0"/>
+                <a:ea typeface="Calibri" pitchFamily="34" charset="-122"/>
+                <a:cs typeface="Calibri" pitchFamily="34" charset="-120"/>
+              </a:rPr>
+              <a:t>ARA ÉS EL TORN VOSTRE</a:t>
+            </a:r>
+            <a:endParaRPr lang="en-US" sz="1400" dirty="0"/>
+          </a:p>
+        </p:txBody>
+      </p:sp>
+      <p:sp>
+        <p:nvSpPr>
+          <p:cNvPr id="6" name="Text 3"/>
+          <p:cNvSpPr txBox="1"/>
+          <p:nvPr/>
+        </p:nvSpPr>
+        <p:spPr>
+          <a:xfrm>
+            <a:off x="3246120" y="2240280"/>
+            <a:ext cx="8503920" cy="1371600"/>
+          </a:xfrm>
+          <a:prstGeom prst="rect">
+            <a:avLst/>
+          </a:prstGeom>
+          <a:noFill/>
+          <a:ln/>
+        </p:spPr>
+        <p:txBody>
+          <a:bodyPr wrap="square" lIns="0" tIns="0" rIns="0" bIns="0" rtlCol="0" anchor="ctr"/>
+          <a:lstStyle/>
+          <a:p>
+            <a:pPr indent="0" marL="0">
+              <a:buNone/>
+            </a:pPr>
+            <a:r>
+              <a:rPr lang="en-US" sz="2500" b="1" dirty="0">
+                <a:solidFill>
+                  <a:srgbClr val="0B1B29"/>
+                </a:solidFill>
+                <a:latin typeface="Cambria" pitchFamily="34" charset="0"/>
+                <a:ea typeface="Cambria" pitchFamily="34" charset="-122"/>
+                <a:cs typeface="Cambria" pitchFamily="34" charset="-120"/>
+              </a:rPr>
+              <a:t>Heu d'escollir un SAI per a un petit despatx amb 3 ordinadors i 1 servidor.</a:t>
+            </a:r>
+            <a:endParaRPr lang="en-US" sz="2500" dirty="0"/>
+          </a:p>
+        </p:txBody>
+      </p:sp>
+      <p:sp>
+        <p:nvSpPr>
+          <p:cNvPr id="7" name="Text 4"/>
+          <p:cNvSpPr txBox="1"/>
+          <p:nvPr/>
+        </p:nvSpPr>
+        <p:spPr>
+          <a:xfrm>
+            <a:off x="3291840" y="3657600"/>
+            <a:ext cx="8229600" cy="1188720"/>
+          </a:xfrm>
+          <a:prstGeom prst="rect">
+            <a:avLst/>
+          </a:prstGeom>
+          <a:noFill/>
+          <a:ln/>
+        </p:spPr>
+        <p:txBody>
+          <a:bodyPr wrap="square" lIns="0" tIns="0" rIns="0" bIns="0" rtlCol="0" anchor="ctr"/>
+          <a:lstStyle/>
+          <a:p>
+            <a:pPr indent="0" marL="0">
+              <a:buNone/>
+            </a:pPr>
+            <a:r>
+              <a:rPr lang="en-US" sz="1550" dirty="0">
+                <a:solidFill>
+                  <a:srgbClr val="0B1B29"/>
+                </a:solidFill>
+                <a:latin typeface="Calibri" pitchFamily="34" charset="0"/>
+                <a:ea typeface="Calibri" pitchFamily="34" charset="-122"/>
+                <a:cs typeface="Calibri" pitchFamily="34" charset="-120"/>
+              </a:rPr>
+              <a:t>En grups de 3: decidiu quin tipus de SAI (standby, interactiu o online) triaríeu, quina autonomia demanaríeu i com calcularíeu la càrrega necessària (en W).</a:t>
+            </a:r>
+            <a:endParaRPr lang="en-US" sz="1550" dirty="0"/>
+          </a:p>
+        </p:txBody>
+      </p:sp>
+      <p:sp>
+        <p:nvSpPr>
+          <p:cNvPr id="8" name="Shape 5"/>
+          <p:cNvSpPr/>
+          <p:nvPr/>
+        </p:nvSpPr>
+        <p:spPr>
+          <a:xfrm>
+            <a:off x="3291840" y="4937760"/>
+            <a:ext cx="8138160" cy="1051560"/>
+          </a:xfrm>
+          <a:prstGeom prst="roundRect">
+            <a:avLst>
+              <a:gd name="adj" fmla="val 8696"/>
+            </a:avLst>
+          </a:prstGeom>
+          <a:solidFill>
+            <a:srgbClr val="13293D"/>
+          </a:solidFill>
+          <a:ln/>
+        </p:spPr>
+        <p:txBody>
+          <a:bodyPr/>
+          <a:p/>
+        </p:txBody>
+      </p:sp>
+      <p:sp>
+        <p:nvSpPr>
+          <p:cNvPr id="9" name="Text 6"/>
+          <p:cNvSpPr txBox="1"/>
+          <p:nvPr/>
+        </p:nvSpPr>
+        <p:spPr>
+          <a:xfrm>
+            <a:off x="3566160" y="4937760"/>
+            <a:ext cx="7680960" cy="1051560"/>
+          </a:xfrm>
+          <a:prstGeom prst="rect">
+            <a:avLst/>
+          </a:prstGeom>
+          <a:noFill/>
+          <a:ln/>
+        </p:spPr>
+        <p:txBody>
+          <a:bodyPr wrap="square" lIns="0" tIns="0" rIns="0" bIns="0" rtlCol="0" anchor="ctr"/>
+          <a:lstStyle/>
+          <a:p>
+            <a:pPr indent="0" marL="0">
+              <a:buNone/>
+            </a:pPr>
+            <a:r>
+              <a:rPr lang="en-US" sz="1500" b="1" dirty="0">
+                <a:solidFill>
+                  <a:srgbClr val="FFFFFF"/>
+                </a:solidFill>
+                <a:latin typeface="Calibri" pitchFamily="34" charset="0"/>
+                <a:ea typeface="Calibri" pitchFamily="34" charset="-122"/>
+                <a:cs typeface="Calibri" pitchFamily="34" charset="-120"/>
+              </a:rPr>
+              <a:t>10 minuts en grup + posada en comú</a:t>
+            </a:r>
+            <a:endParaRPr lang="en-US" sz="1500" dirty="0"/>
+          </a:p>
+        </p:txBody>
+      </p:sp>
+    </p:spTree>
+  </p:cSld>
+  <p:clrMapOvr>
+    <a:masterClrMapping/>
+  </p:clrMapOvr>
+</p:sld>
+</file>
+
+<file path=ppt/slides/slide24.xml><?xml version="1.0" encoding="utf-8"?>
 <p:sld xmlns:a="http://schemas.openxmlformats.org/drawingml/2006/main" xmlns:r="http://schemas.openxmlformats.org/officeDocument/2006/relationships" xmlns:p="http://schemas.openxmlformats.org/presentationml/2006/main">
   <p:cSld name="Slide 20">
     <p:bg>
@@ -10684,6 +11794,10 @@
             </a:outerShdw>
           </a:effectLst>
         </p:spPr>
+        <p:txBody>
+          <a:bodyPr/>
+          <a:p/>
+        </p:txBody>
       </p:sp>
       <p:sp>
         <p:nvSpPr>
@@ -10704,6 +11818,10 @@
           </a:solidFill>
           <a:ln/>
         </p:spPr>
+        <p:txBody>
+          <a:bodyPr/>
+          <a:p/>
+        </p:txBody>
       </p:sp>
       <p:pic>
         <p:nvPicPr>
@@ -10927,7 +12045,7 @@
                 <a:ea typeface="Calibri" pitchFamily="34" charset="-122"/>
                 <a:cs typeface="Calibri" pitchFamily="34" charset="-120"/>
               </a:rPr>
-              <a:t>19</a:t>
+              <a:t>24</a:t>
             </a:r>
             <a:endParaRPr lang="en-US" sz="1000" dirty="0"/>
           </a:p>
@@ -11069,6 +12187,10 @@
             <a:prstDash val="solid"/>
           </a:ln>
         </p:spPr>
+        <p:txBody>
+          <a:bodyPr/>
+          <a:p/>
+        </p:txBody>
       </p:sp>
       <p:sp>
         <p:nvSpPr>
@@ -11089,6 +12211,10 @@
           </a:solidFill>
           <a:ln/>
         </p:spPr>
+        <p:txBody>
+          <a:bodyPr/>
+          <a:p/>
+        </p:txBody>
       </p:sp>
       <p:pic>
         <p:nvPicPr>
@@ -11213,6 +12339,10 @@
           </a:solidFill>
           <a:ln/>
         </p:spPr>
+        <p:txBody>
+          <a:bodyPr/>
+          <a:p/>
+        </p:txBody>
       </p:sp>
       <p:sp>
         <p:nvSpPr>
@@ -11233,6 +12363,10 @@
           </a:solidFill>
           <a:ln/>
         </p:spPr>
+        <p:txBody>
+          <a:bodyPr/>
+          <a:p/>
+        </p:txBody>
       </p:sp>
       <p:pic>
         <p:nvPicPr>
@@ -11355,6 +12489,10 @@
           </a:solidFill>
           <a:ln/>
         </p:spPr>
+        <p:txBody>
+          <a:bodyPr/>
+          <a:p/>
+        </p:txBody>
       </p:sp>
       <p:pic>
         <p:nvPicPr>
@@ -11548,6 +12686,10 @@
           </a:solidFill>
           <a:ln/>
         </p:spPr>
+        <p:txBody>
+          <a:bodyPr/>
+          <a:p/>
+        </p:txBody>
       </p:sp>
       <p:pic>
         <p:nvPicPr>
@@ -11679,6 +12821,10 @@
           </a:solidFill>
           <a:ln/>
         </p:spPr>
+        <p:txBody>
+          <a:bodyPr/>
+          <a:p/>
+        </p:txBody>
       </p:sp>
       <p:sp>
         <p:nvSpPr>
@@ -11896,6 +13042,10 @@
             </a:outerShdw>
           </a:effectLst>
         </p:spPr>
+        <p:txBody>
+          <a:bodyPr/>
+          <a:p/>
+        </p:txBody>
       </p:sp>
       <p:sp>
         <p:nvSpPr>
@@ -11916,6 +13066,10 @@
           </a:solidFill>
           <a:ln/>
         </p:spPr>
+        <p:txBody>
+          <a:bodyPr/>
+          <a:p/>
+        </p:txBody>
       </p:sp>
       <p:pic>
         <p:nvPicPr>
@@ -12047,6 +13201,10 @@
             </a:outerShdw>
           </a:effectLst>
         </p:spPr>
+        <p:txBody>
+          <a:bodyPr/>
+          <a:p/>
+        </p:txBody>
       </p:sp>
       <p:sp>
         <p:nvSpPr>
@@ -12067,6 +13225,10 @@
           </a:solidFill>
           <a:ln/>
         </p:spPr>
+        <p:txBody>
+          <a:bodyPr/>
+          <a:p/>
+        </p:txBody>
       </p:sp>
       <p:pic>
         <p:nvPicPr>
@@ -12198,6 +13360,10 @@
             </a:outerShdw>
           </a:effectLst>
         </p:spPr>
+        <p:txBody>
+          <a:bodyPr/>
+          <a:p/>
+        </p:txBody>
       </p:sp>
       <p:sp>
         <p:nvSpPr>
@@ -12218,6 +13384,10 @@
           </a:solidFill>
           <a:ln/>
         </p:spPr>
+        <p:txBody>
+          <a:bodyPr/>
+          <a:p/>
+        </p:txBody>
       </p:sp>
       <p:pic>
         <p:nvPicPr>
@@ -12349,6 +13519,10 @@
             </a:outerShdw>
           </a:effectLst>
         </p:spPr>
+        <p:txBody>
+          <a:bodyPr/>
+          <a:p/>
+        </p:txBody>
       </p:sp>
       <p:sp>
         <p:nvSpPr>
@@ -12369,6 +13543,10 @@
           </a:solidFill>
           <a:ln/>
         </p:spPr>
+        <p:txBody>
+          <a:bodyPr/>
+          <a:p/>
+        </p:txBody>
       </p:sp>
       <p:pic>
         <p:nvPicPr>
@@ -12681,6 +13859,10 @@
           </a:solidFill>
           <a:ln/>
         </p:spPr>
+        <p:txBody>
+          <a:bodyPr/>
+          <a:p/>
+        </p:txBody>
       </p:sp>
       <p:sp>
         <p:nvSpPr>
@@ -12781,6 +13963,10 @@
           </a:solidFill>
           <a:ln/>
         </p:spPr>
+        <p:txBody>
+          <a:bodyPr/>
+          <a:p/>
+        </p:txBody>
       </p:sp>
       <p:sp>
         <p:nvSpPr>
@@ -12881,6 +14067,10 @@
           </a:solidFill>
           <a:ln/>
         </p:spPr>
+        <p:txBody>
+          <a:bodyPr/>
+          <a:p/>
+        </p:txBody>
       </p:sp>
       <p:sp>
         <p:nvSpPr>
@@ -13176,6 +14366,10 @@
             </a:outerShdw>
           </a:effectLst>
         </p:spPr>
+        <p:txBody>
+          <a:bodyPr/>
+          <a:p/>
+        </p:txBody>
       </p:sp>
       <p:sp>
         <p:nvSpPr>
@@ -13196,6 +14390,10 @@
           </a:solidFill>
           <a:ln/>
         </p:spPr>
+        <p:txBody>
+          <a:bodyPr/>
+          <a:p/>
+        </p:txBody>
       </p:sp>
       <p:pic>
         <p:nvPicPr>
@@ -13394,6 +14592,10 @@
             </a:outerShdw>
           </a:effectLst>
         </p:spPr>
+        <p:txBody>
+          <a:bodyPr/>
+          <a:p/>
+        </p:txBody>
       </p:sp>
       <p:sp>
         <p:nvSpPr>
@@ -13414,6 +14616,10 @@
           </a:solidFill>
           <a:ln/>
         </p:spPr>
+        <p:txBody>
+          <a:bodyPr/>
+          <a:p/>
+        </p:txBody>
       </p:sp>
       <p:pic>
         <p:nvPicPr>
@@ -13560,6 +14766,21 @@
               <a:t>Davant d'una tempesta, el més segur és desendollar l'equip.</a:t>
             </a:r>
             <a:endParaRPr lang="en-US" sz="1300" dirty="0"/>
+          </a:p>
+          <a:p>
+            <a:pPr>
+              <a:spcBef>
+                <a:spcPts val="800"/>
+              </a:spcBef>
+            </a:pPr>
+            <a:r>
+              <a:rPr sz="1200" i="1">
+                <a:solidFill>
+                  <a:srgbClr val="5B6B77"/>
+                </a:solidFill>
+              </a:rPr>
+              <a:t>Els llamps poden provocar sobretensions tan altes que el propi descarregador no les pugui filtrar: per això cal desendollar l'equip, no només confiar-hi.</a:t>
+            </a:r>
           </a:p>
         </p:txBody>
       </p:sp>
@@ -13731,6 +14952,10 @@
           </a:solidFill>
           <a:ln/>
         </p:spPr>
+        <p:txBody>
+          <a:bodyPr/>
+          <a:p/>
+        </p:txBody>
       </p:sp>
       <p:pic>
         <p:nvPicPr>
@@ -13841,6 +15066,10 @@
           </a:solidFill>
           <a:ln/>
         </p:spPr>
+        <p:txBody>
+          <a:bodyPr/>
+          <a:p/>
+        </p:txBody>
       </p:sp>
       <p:sp>
         <p:nvSpPr>
@@ -14095,6 +15324,10 @@
             <a:prstDash val="solid"/>
           </a:ln>
         </p:spPr>
+        <p:txBody>
+          <a:bodyPr/>
+          <a:p/>
+        </p:txBody>
       </p:sp>
       <p:sp>
         <p:nvSpPr>
@@ -14115,6 +15348,10 @@
           </a:solidFill>
           <a:ln/>
         </p:spPr>
+        <p:txBody>
+          <a:bodyPr/>
+          <a:p/>
+        </p:txBody>
       </p:sp>
       <p:pic>
         <p:nvPicPr>
@@ -14244,6 +15481,10 @@
             <a:prstDash val="solid"/>
           </a:ln>
         </p:spPr>
+        <p:txBody>
+          <a:bodyPr/>
+          <a:p/>
+        </p:txBody>
       </p:sp>
       <p:sp>
         <p:nvSpPr>
@@ -14264,6 +15505,10 @@
           </a:solidFill>
           <a:ln/>
         </p:spPr>
+        <p:txBody>
+          <a:bodyPr/>
+          <a:p/>
+        </p:txBody>
       </p:sp>
       <p:pic>
         <p:nvPicPr>
@@ -14393,6 +15638,10 @@
             <a:prstDash val="solid"/>
           </a:ln>
         </p:spPr>
+        <p:txBody>
+          <a:bodyPr/>
+          <a:p/>
+        </p:txBody>
       </p:sp>
       <p:sp>
         <p:nvSpPr>
@@ -14413,6 +15662,10 @@
           </a:solidFill>
           <a:ln/>
         </p:spPr>
+        <p:txBody>
+          <a:bodyPr/>
+          <a:p/>
+        </p:txBody>
       </p:sp>
       <p:pic>
         <p:nvPicPr>
